--- a/docs/SX3K-코팅Section-자료.pptx
+++ b/docs/SX3K-코팅Section-자료.pptx
@@ -9,9 +9,10 @@
     <p:sldId id="257" r:id="rId3"/>
     <p:sldId id="258" r:id="rId4"/>
     <p:sldId id="259" r:id="rId5"/>
+    <p:sldId id="260" r:id="rId6"/>
   </p:sldIdLst>
   <p:notesMasterIdLst>
-    <p:notesMasterId r:id="rId6"/>
+    <p:notesMasterId r:id="rId7"/>
   </p:notesMasterIdLst>
   <p:sldSz cx="9144000" cy="6858000"/>
   <p:notesSz cx="6858000" cy="9144000"/>
@@ -793,6 +794,94 @@
             <a:fld id="{F7021451-1387-4CA6-816F-3879F97B5CBC}" type="slidenum">
               <a:rPr lang="en-US"/>
               <a:t>4</a:t>
+            </a:fld>
+            <a:endParaRPr lang="en-US"/>
+          </a:p>
+        </p:txBody>
+      </p:sp>
+    </p:spTree>
+    <p:extLst>
+      <p:ext uri="{BB962C8B-B14F-4D97-AF65-F5344CB8AC3E}">
+        <p14:creationId xmlns:p14="http://schemas.microsoft.com/office/powerpoint/2010/main" val="1024086991"/>
+      </p:ext>
+    </p:extLst>
+  </p:cSld>
+  <p:clrMapOvr>
+    <a:masterClrMapping/>
+  </p:clrMapOvr>
+</p:notes>
+</file>
+
+<file path=ppt/notesSlides/notesSlide5.xml><?xml version="1.0" encoding="utf-8"?>
+<p:notes xmlns:a="http://schemas.openxmlformats.org/drawingml/2006/main" xmlns:r="http://schemas.openxmlformats.org/officeDocument/2006/relationships" xmlns:p="http://schemas.openxmlformats.org/presentationml/2006/main">
+  <p:cSld>
+    <p:spTree>
+      <p:nvGrpSpPr>
+        <p:cNvPr id="1" name=""/>
+        <p:cNvGrpSpPr/>
+        <p:nvPr/>
+      </p:nvGrpSpPr>
+      <p:grpSpPr>
+        <a:xfrm>
+          <a:off x="0" y="0"/>
+          <a:ext cx="0" cy="0"/>
+          <a:chOff x="0" y="0"/>
+          <a:chExt cx="0" cy="0"/>
+        </a:xfrm>
+      </p:grpSpPr>
+      <p:sp>
+        <p:nvSpPr>
+          <p:cNvPr id="2" name="Slide Image Placeholder 1"/>
+          <p:cNvSpPr>
+            <a:spLocks noGrp="1" noRot="1" noChangeAspect="1"/>
+          </p:cNvSpPr>
+          <p:nvPr>
+            <p:ph type="sldImg"/>
+          </p:nvPr>
+        </p:nvSpPr>
+        <p:spPr/>
+      </p:sp>
+      <p:sp>
+        <p:nvSpPr>
+          <p:cNvPr id="3" name="Notes Placeholder 2"/>
+          <p:cNvSpPr>
+            <a:spLocks noGrp="1"/>
+          </p:cNvSpPr>
+          <p:nvPr>
+            <p:ph type="body" idx="1"/>
+          </p:nvPr>
+        </p:nvSpPr>
+        <p:spPr/>
+        <p:txBody>
+          <a:bodyPr/>
+          <a:lstStyle/>
+          <a:p>
+            <a:r>
+              <a:rPr lang="en-US" dirty="0"/>
+              <a:t/>
+            </a:r>
+            <a:endParaRPr lang="en-US" dirty="0"/>
+          </a:p>
+        </p:txBody>
+      </p:sp>
+      <p:sp>
+        <p:nvSpPr>
+          <p:cNvPr id="4" name="Slide Number Placeholder 3"/>
+          <p:cNvSpPr>
+            <a:spLocks noGrp="1"/>
+          </p:cNvSpPr>
+          <p:nvPr>
+            <p:ph type="sldNum" sz="quarter" idx="10"/>
+          </p:nvPr>
+        </p:nvSpPr>
+        <p:spPr/>
+        <p:txBody>
+          <a:bodyPr/>
+          <a:lstStyle/>
+          <a:p>
+            <a:fld id="{F7021451-1387-4CA6-816F-3879F97B5CBC}" type="slidenum">
+              <a:rPr lang="en-US"/>
+              <a:t>5</a:t>
             </a:fld>
             <a:endParaRPr lang="en-US"/>
           </a:p>
@@ -1323,15 +1412,3014 @@
                 <a:ea typeface="Arial" pitchFamily="34" charset="-122"/>
                 <a:cs typeface="Arial" pitchFamily="34" charset="-120"/>
               </a:rPr>
-              <a:t>1.  재원</a:t>
+              <a:t>1.  코팅 라인 구성</a:t>
             </a:r>
             <a:endParaRPr lang="en-US" sz="1300" dirty="0"/>
+          </a:p>
+        </p:txBody>
+      </p:sp>
+      <p:sp>
+        <p:nvSpPr>
+          <p:cNvPr id="6" name="Shape 4"/>
+          <p:cNvSpPr/>
+          <p:nvPr/>
+        </p:nvSpPr>
+        <p:spPr>
+          <a:xfrm>
+            <a:off x="457200" y="1371600"/>
+            <a:ext cx="1234440" cy="777240"/>
+          </a:xfrm>
+          <a:prstGeom prst="rect">
+            <a:avLst/>
+          </a:prstGeom>
+          <a:solidFill>
+            <a:srgbClr val="F2F2F2"/>
+          </a:solidFill>
+          <a:ln w="12700">
+            <a:solidFill>
+              <a:srgbClr val="2E5B9F"/>
+            </a:solidFill>
+            <a:prstDash val="solid"/>
+          </a:ln>
+        </p:spPr>
+      </p:sp>
+      <p:sp>
+        <p:nvSpPr>
+          <p:cNvPr id="7" name="Text 5"/>
+          <p:cNvSpPr/>
+          <p:nvPr/>
+        </p:nvSpPr>
+        <p:spPr>
+          <a:xfrm>
+            <a:off x="457200" y="1371600"/>
+            <a:ext cx="1234440" cy="777240"/>
+          </a:xfrm>
+          <a:prstGeom prst="rect">
+            <a:avLst/>
+          </a:prstGeom>
+          <a:noFill/>
+          <a:ln/>
+        </p:spPr>
+        <p:txBody>
+          <a:bodyPr wrap="square" lIns="0" tIns="0" rIns="0" bIns="0" rtlCol="0" anchor="ctr"/>
+          <a:lstStyle/>
+          <a:p>
+            <a:pPr algn="ctr" indent="0" marL="0">
+              <a:buNone/>
+            </a:pPr>
+            <a:r>
+              <a:rPr lang="en-US" sz="850" b="1" dirty="0">
+                <a:solidFill>
+                  <a:srgbClr val="17365D"/>
+                </a:solidFill>
+                <a:latin typeface="Arial" pitchFamily="34" charset="0"/>
+                <a:ea typeface="Arial" pitchFamily="34" charset="-122"/>
+                <a:cs typeface="Arial" pitchFamily="34" charset="-120"/>
+              </a:rPr>
+              <a:t>Loader</a:t>
+            </a:r>
+            <a:endParaRPr lang="en-US" sz="850" dirty="0"/>
+          </a:p>
+          <a:p>
+            <a:pPr algn="ctr" indent="0" marL="0">
+              <a:buNone/>
+            </a:pPr>
+            <a:r>
+              <a:rPr lang="en-US" sz="850" b="1" dirty="0">
+                <a:solidFill>
+                  <a:srgbClr val="17365D"/>
+                </a:solidFill>
+                <a:latin typeface="Arial" pitchFamily="34" charset="0"/>
+                <a:ea typeface="Arial" pitchFamily="34" charset="-122"/>
+                <a:cs typeface="Arial" pitchFamily="34" charset="-120"/>
+              </a:rPr>
+              <a:t>(AJRLD-150U)</a:t>
+            </a:r>
+            <a:endParaRPr lang="en-US" sz="850" dirty="0"/>
+          </a:p>
+        </p:txBody>
+      </p:sp>
+      <p:sp>
+        <p:nvSpPr>
+          <p:cNvPr id="8" name="Text 6"/>
+          <p:cNvSpPr/>
+          <p:nvPr/>
+        </p:nvSpPr>
+        <p:spPr>
+          <a:xfrm>
+            <a:off x="1664208" y="1623060"/>
+            <a:ext cx="256032" cy="274320"/>
+          </a:xfrm>
+          <a:prstGeom prst="rect">
+            <a:avLst/>
+          </a:prstGeom>
+          <a:noFill/>
+          <a:ln/>
+        </p:spPr>
+        <p:txBody>
+          <a:bodyPr wrap="square" lIns="0" tIns="0" rIns="0" bIns="0" rtlCol="0" anchor="ctr"/>
+          <a:lstStyle/>
+          <a:p>
+            <a:pPr algn="ctr" indent="0" marL="0">
+              <a:buNone/>
+            </a:pPr>
+            <a:r>
+              <a:rPr lang="en-US" sz="1000" dirty="0">
+                <a:solidFill>
+                  <a:srgbClr val="2E5B9F"/>
+                </a:solidFill>
+                <a:latin typeface="Arial" pitchFamily="34" charset="0"/>
+                <a:ea typeface="Arial" pitchFamily="34" charset="-122"/>
+                <a:cs typeface="Arial" pitchFamily="34" charset="-120"/>
+              </a:rPr>
+              <a:t>▶</a:t>
+            </a:r>
+            <a:endParaRPr lang="en-US" sz="1000" dirty="0"/>
+          </a:p>
+        </p:txBody>
+      </p:sp>
+      <p:sp>
+        <p:nvSpPr>
+          <p:cNvPr id="9" name="Shape 7"/>
+          <p:cNvSpPr/>
+          <p:nvPr/>
+        </p:nvSpPr>
+        <p:spPr>
+          <a:xfrm>
+            <a:off x="1892808" y="1371600"/>
+            <a:ext cx="1234440" cy="777240"/>
+          </a:xfrm>
+          <a:prstGeom prst="rect">
+            <a:avLst/>
+          </a:prstGeom>
+          <a:solidFill>
+            <a:srgbClr val="DCE6F1"/>
+          </a:solidFill>
+          <a:ln w="12700">
+            <a:solidFill>
+              <a:srgbClr val="2E5B9F"/>
+            </a:solidFill>
+            <a:prstDash val="solid"/>
+          </a:ln>
+        </p:spPr>
+      </p:sp>
+      <p:sp>
+        <p:nvSpPr>
+          <p:cNvPr id="10" name="Text 8"/>
+          <p:cNvSpPr/>
+          <p:nvPr/>
+        </p:nvSpPr>
+        <p:spPr>
+          <a:xfrm>
+            <a:off x="1892808" y="1371600"/>
+            <a:ext cx="1234440" cy="777240"/>
+          </a:xfrm>
+          <a:prstGeom prst="rect">
+            <a:avLst/>
+          </a:prstGeom>
+          <a:noFill/>
+          <a:ln/>
+        </p:spPr>
+        <p:txBody>
+          <a:bodyPr wrap="square" lIns="0" tIns="0" rIns="0" bIns="0" rtlCol="0" anchor="ctr"/>
+          <a:lstStyle/>
+          <a:p>
+            <a:pPr algn="ctr" indent="0" marL="0">
+              <a:buNone/>
+            </a:pPr>
+            <a:r>
+              <a:rPr lang="en-US" sz="850" b="1" dirty="0">
+                <a:solidFill>
+                  <a:srgbClr val="17365D"/>
+                </a:solidFill>
+                <a:latin typeface="Arial" pitchFamily="34" charset="0"/>
+                <a:ea typeface="Arial" pitchFamily="34" charset="-122"/>
+                <a:cs typeface="Arial" pitchFamily="34" charset="-120"/>
+              </a:rPr>
+              <a:t>일반 코팅기 #1</a:t>
+            </a:r>
+            <a:endParaRPr lang="en-US" sz="850" dirty="0"/>
+          </a:p>
+          <a:p>
+            <a:pPr algn="ctr" indent="0" marL="0">
+              <a:buNone/>
+            </a:pPr>
+            <a:r>
+              <a:rPr lang="en-US" sz="850" b="1" dirty="0">
+                <a:solidFill>
+                  <a:srgbClr val="17365D"/>
+                </a:solidFill>
+                <a:latin typeface="Arial" pitchFamily="34" charset="0"/>
+                <a:ea typeface="Arial" pitchFamily="34" charset="-122"/>
+                <a:cs typeface="Arial" pitchFamily="34" charset="-120"/>
+              </a:rPr>
+              <a:t>(Mi-1400)</a:t>
+            </a:r>
+            <a:endParaRPr lang="en-US" sz="850" dirty="0"/>
+          </a:p>
+        </p:txBody>
+      </p:sp>
+      <p:sp>
+        <p:nvSpPr>
+          <p:cNvPr id="11" name="Text 9"/>
+          <p:cNvSpPr/>
+          <p:nvPr/>
+        </p:nvSpPr>
+        <p:spPr>
+          <a:xfrm>
+            <a:off x="3099816" y="1623060"/>
+            <a:ext cx="256032" cy="274320"/>
+          </a:xfrm>
+          <a:prstGeom prst="rect">
+            <a:avLst/>
+          </a:prstGeom>
+          <a:noFill/>
+          <a:ln/>
+        </p:spPr>
+        <p:txBody>
+          <a:bodyPr wrap="square" lIns="0" tIns="0" rIns="0" bIns="0" rtlCol="0" anchor="ctr"/>
+          <a:lstStyle/>
+          <a:p>
+            <a:pPr algn="ctr" indent="0" marL="0">
+              <a:buNone/>
+            </a:pPr>
+            <a:r>
+              <a:rPr lang="en-US" sz="1000" dirty="0">
+                <a:solidFill>
+                  <a:srgbClr val="2E5B9F"/>
+                </a:solidFill>
+                <a:latin typeface="Arial" pitchFamily="34" charset="0"/>
+                <a:ea typeface="Arial" pitchFamily="34" charset="-122"/>
+                <a:cs typeface="Arial" pitchFamily="34" charset="-120"/>
+              </a:rPr>
+              <a:t>▶</a:t>
+            </a:r>
+            <a:endParaRPr lang="en-US" sz="1000" dirty="0"/>
+          </a:p>
+        </p:txBody>
+      </p:sp>
+      <p:sp>
+        <p:nvSpPr>
+          <p:cNvPr id="12" name="Shape 10"/>
+          <p:cNvSpPr/>
+          <p:nvPr/>
+        </p:nvSpPr>
+        <p:spPr>
+          <a:xfrm>
+            <a:off x="3328416" y="1371600"/>
+            <a:ext cx="1234440" cy="777240"/>
+          </a:xfrm>
+          <a:prstGeom prst="rect">
+            <a:avLst/>
+          </a:prstGeom>
+          <a:solidFill>
+            <a:srgbClr val="DCE6F1"/>
+          </a:solidFill>
+          <a:ln w="12700">
+            <a:solidFill>
+              <a:srgbClr val="2E5B9F"/>
+            </a:solidFill>
+            <a:prstDash val="solid"/>
+          </a:ln>
+        </p:spPr>
+      </p:sp>
+      <p:sp>
+        <p:nvSpPr>
+          <p:cNvPr id="13" name="Text 11"/>
+          <p:cNvSpPr/>
+          <p:nvPr/>
+        </p:nvSpPr>
+        <p:spPr>
+          <a:xfrm>
+            <a:off x="3328416" y="1371600"/>
+            <a:ext cx="1234440" cy="777240"/>
+          </a:xfrm>
+          <a:prstGeom prst="rect">
+            <a:avLst/>
+          </a:prstGeom>
+          <a:noFill/>
+          <a:ln/>
+        </p:spPr>
+        <p:txBody>
+          <a:bodyPr wrap="square" lIns="0" tIns="0" rIns="0" bIns="0" rtlCol="0" anchor="ctr"/>
+          <a:lstStyle/>
+          <a:p>
+            <a:pPr algn="ctr" indent="0" marL="0">
+              <a:buNone/>
+            </a:pPr>
+            <a:r>
+              <a:rPr lang="en-US" sz="850" b="1" dirty="0">
+                <a:solidFill>
+                  <a:srgbClr val="17365D"/>
+                </a:solidFill>
+                <a:latin typeface="Arial" pitchFamily="34" charset="0"/>
+                <a:ea typeface="Arial" pitchFamily="34" charset="-122"/>
+                <a:cs typeface="Arial" pitchFamily="34" charset="-120"/>
+              </a:rPr>
+              <a:t>일반 코팅기 #2</a:t>
+            </a:r>
+            <a:endParaRPr lang="en-US" sz="850" dirty="0"/>
+          </a:p>
+          <a:p>
+            <a:pPr algn="ctr" indent="0" marL="0">
+              <a:buNone/>
+            </a:pPr>
+            <a:r>
+              <a:rPr lang="en-US" sz="850" b="1" dirty="0">
+                <a:solidFill>
+                  <a:srgbClr val="17365D"/>
+                </a:solidFill>
+                <a:latin typeface="Arial" pitchFamily="34" charset="0"/>
+                <a:ea typeface="Arial" pitchFamily="34" charset="-122"/>
+                <a:cs typeface="Arial" pitchFamily="34" charset="-120"/>
+              </a:rPr>
+              <a:t>(Mi-1400)</a:t>
+            </a:r>
+            <a:endParaRPr lang="en-US" sz="850" dirty="0"/>
+          </a:p>
+        </p:txBody>
+      </p:sp>
+      <p:sp>
+        <p:nvSpPr>
+          <p:cNvPr id="14" name="Text 12"/>
+          <p:cNvSpPr/>
+          <p:nvPr/>
+        </p:nvSpPr>
+        <p:spPr>
+          <a:xfrm>
+            <a:off x="4535424" y="1623060"/>
+            <a:ext cx="256032" cy="274320"/>
+          </a:xfrm>
+          <a:prstGeom prst="rect">
+            <a:avLst/>
+          </a:prstGeom>
+          <a:noFill/>
+          <a:ln/>
+        </p:spPr>
+        <p:txBody>
+          <a:bodyPr wrap="square" lIns="0" tIns="0" rIns="0" bIns="0" rtlCol="0" anchor="ctr"/>
+          <a:lstStyle/>
+          <a:p>
+            <a:pPr algn="ctr" indent="0" marL="0">
+              <a:buNone/>
+            </a:pPr>
+            <a:r>
+              <a:rPr lang="en-US" sz="1000" dirty="0">
+                <a:solidFill>
+                  <a:srgbClr val="2E5B9F"/>
+                </a:solidFill>
+                <a:latin typeface="Arial" pitchFamily="34" charset="0"/>
+                <a:ea typeface="Arial" pitchFamily="34" charset="-122"/>
+                <a:cs typeface="Arial" pitchFamily="34" charset="-120"/>
+              </a:rPr>
+              <a:t>▶</a:t>
+            </a:r>
+            <a:endParaRPr lang="en-US" sz="1000" dirty="0"/>
+          </a:p>
+        </p:txBody>
+      </p:sp>
+      <p:sp>
+        <p:nvSpPr>
+          <p:cNvPr id="15" name="Shape 13"/>
+          <p:cNvSpPr/>
+          <p:nvPr/>
+        </p:nvSpPr>
+        <p:spPr>
+          <a:xfrm>
+            <a:off x="4764024" y="1371600"/>
+            <a:ext cx="1234440" cy="777240"/>
+          </a:xfrm>
+          <a:prstGeom prst="rect">
+            <a:avLst/>
+          </a:prstGeom>
+          <a:solidFill>
+            <a:srgbClr val="DCE6F1"/>
+          </a:solidFill>
+          <a:ln w="12700">
+            <a:solidFill>
+              <a:srgbClr val="2E5B9F"/>
+            </a:solidFill>
+            <a:prstDash val="solid"/>
+          </a:ln>
+        </p:spPr>
+      </p:sp>
+      <p:sp>
+        <p:nvSpPr>
+          <p:cNvPr id="16" name="Text 14"/>
+          <p:cNvSpPr/>
+          <p:nvPr/>
+        </p:nvSpPr>
+        <p:spPr>
+          <a:xfrm>
+            <a:off x="4764024" y="1371600"/>
+            <a:ext cx="1234440" cy="777240"/>
+          </a:xfrm>
+          <a:prstGeom prst="rect">
+            <a:avLst/>
+          </a:prstGeom>
+          <a:noFill/>
+          <a:ln/>
+        </p:spPr>
+        <p:txBody>
+          <a:bodyPr wrap="square" lIns="0" tIns="0" rIns="0" bIns="0" rtlCol="0" anchor="ctr"/>
+          <a:lstStyle/>
+          <a:p>
+            <a:pPr algn="ctr" indent="0" marL="0">
+              <a:buNone/>
+            </a:pPr>
+            <a:r>
+              <a:rPr lang="en-US" sz="850" b="1" dirty="0">
+                <a:solidFill>
+                  <a:srgbClr val="17365D"/>
+                </a:solidFill>
+                <a:latin typeface="Arial" pitchFamily="34" charset="0"/>
+                <a:ea typeface="Arial" pitchFamily="34" charset="-122"/>
+                <a:cs typeface="Arial" pitchFamily="34" charset="-120"/>
+              </a:rPr>
+              <a:t>Tilt 코팅기</a:t>
+            </a:r>
+            <a:endParaRPr lang="en-US" sz="850" dirty="0"/>
+          </a:p>
+          <a:p>
+            <a:pPr algn="ctr" indent="0" marL="0">
+              <a:buNone/>
+            </a:pPr>
+            <a:r>
+              <a:rPr lang="en-US" sz="850" b="1" dirty="0">
+                <a:solidFill>
+                  <a:srgbClr val="17365D"/>
+                </a:solidFill>
+                <a:latin typeface="Arial" pitchFamily="34" charset="0"/>
+                <a:ea typeface="Arial" pitchFamily="34" charset="-122"/>
+                <a:cs typeface="Arial" pitchFamily="34" charset="-120"/>
+              </a:rPr>
+              <a:t>(Mi-1600TG)</a:t>
+            </a:r>
+            <a:endParaRPr lang="en-US" sz="850" dirty="0"/>
+          </a:p>
+        </p:txBody>
+      </p:sp>
+      <p:sp>
+        <p:nvSpPr>
+          <p:cNvPr id="17" name="Text 15"/>
+          <p:cNvSpPr/>
+          <p:nvPr/>
+        </p:nvSpPr>
+        <p:spPr>
+          <a:xfrm>
+            <a:off x="5971032" y="1623060"/>
+            <a:ext cx="256032" cy="274320"/>
+          </a:xfrm>
+          <a:prstGeom prst="rect">
+            <a:avLst/>
+          </a:prstGeom>
+          <a:noFill/>
+          <a:ln/>
+        </p:spPr>
+        <p:txBody>
+          <a:bodyPr wrap="square" lIns="0" tIns="0" rIns="0" bIns="0" rtlCol="0" anchor="ctr"/>
+          <a:lstStyle/>
+          <a:p>
+            <a:pPr algn="ctr" indent="0" marL="0">
+              <a:buNone/>
+            </a:pPr>
+            <a:r>
+              <a:rPr lang="en-US" sz="1000" dirty="0">
+                <a:solidFill>
+                  <a:srgbClr val="2E5B9F"/>
+                </a:solidFill>
+                <a:latin typeface="Arial" pitchFamily="34" charset="0"/>
+                <a:ea typeface="Arial" pitchFamily="34" charset="-122"/>
+                <a:cs typeface="Arial" pitchFamily="34" charset="-120"/>
+              </a:rPr>
+              <a:t>▶</a:t>
+            </a:r>
+            <a:endParaRPr lang="en-US" sz="1000" dirty="0"/>
+          </a:p>
+        </p:txBody>
+      </p:sp>
+      <p:sp>
+        <p:nvSpPr>
+          <p:cNvPr id="18" name="Shape 16"/>
+          <p:cNvSpPr/>
+          <p:nvPr/>
+        </p:nvSpPr>
+        <p:spPr>
+          <a:xfrm>
+            <a:off x="6199632" y="1371600"/>
+            <a:ext cx="1234440" cy="777240"/>
+          </a:xfrm>
+          <a:prstGeom prst="rect">
+            <a:avLst/>
+          </a:prstGeom>
+          <a:solidFill>
+            <a:srgbClr val="DCE6F1"/>
+          </a:solidFill>
+          <a:ln w="12700">
+            <a:solidFill>
+              <a:srgbClr val="2E5B9F"/>
+            </a:solidFill>
+            <a:prstDash val="solid"/>
+          </a:ln>
+        </p:spPr>
+      </p:sp>
+      <p:sp>
+        <p:nvSpPr>
+          <p:cNvPr id="19" name="Text 17"/>
+          <p:cNvSpPr/>
+          <p:nvPr/>
+        </p:nvSpPr>
+        <p:spPr>
+          <a:xfrm>
+            <a:off x="6199632" y="1371600"/>
+            <a:ext cx="1234440" cy="777240"/>
+          </a:xfrm>
+          <a:prstGeom prst="rect">
+            <a:avLst/>
+          </a:prstGeom>
+          <a:noFill/>
+          <a:ln/>
+        </p:spPr>
+        <p:txBody>
+          <a:bodyPr wrap="square" lIns="0" tIns="0" rIns="0" bIns="0" rtlCol="0" anchor="ctr"/>
+          <a:lstStyle/>
+          <a:p>
+            <a:pPr algn="ctr" indent="0" marL="0">
+              <a:buNone/>
+            </a:pPr>
+            <a:r>
+              <a:rPr lang="en-US" sz="850" b="1" dirty="0">
+                <a:solidFill>
+                  <a:srgbClr val="17365D"/>
+                </a:solidFill>
+                <a:latin typeface="Arial" pitchFamily="34" charset="0"/>
+                <a:ea typeface="Arial" pitchFamily="34" charset="-122"/>
+                <a:cs typeface="Arial" pitchFamily="34" charset="-120"/>
+              </a:rPr>
+              <a:t>UV 경화기</a:t>
+            </a:r>
+            <a:endParaRPr lang="en-US" sz="850" dirty="0"/>
+          </a:p>
+          <a:p>
+            <a:pPr algn="ctr" indent="0" marL="0">
+              <a:buNone/>
+            </a:pPr>
+            <a:r>
+              <a:rPr lang="en-US" sz="850" b="1" dirty="0">
+                <a:solidFill>
+                  <a:srgbClr val="17365D"/>
+                </a:solidFill>
+                <a:latin typeface="Arial" pitchFamily="34" charset="0"/>
+                <a:ea typeface="Arial" pitchFamily="34" charset="-122"/>
+                <a:cs typeface="Arial" pitchFamily="34" charset="-120"/>
+              </a:rPr>
+              <a:t>(MC-2000UV)</a:t>
+            </a:r>
+            <a:endParaRPr lang="en-US" sz="850" dirty="0"/>
+          </a:p>
+        </p:txBody>
+      </p:sp>
+      <p:sp>
+        <p:nvSpPr>
+          <p:cNvPr id="20" name="Text 18"/>
+          <p:cNvSpPr/>
+          <p:nvPr/>
+        </p:nvSpPr>
+        <p:spPr>
+          <a:xfrm>
+            <a:off x="7406640" y="1623060"/>
+            <a:ext cx="256032" cy="274320"/>
+          </a:xfrm>
+          <a:prstGeom prst="rect">
+            <a:avLst/>
+          </a:prstGeom>
+          <a:noFill/>
+          <a:ln/>
+        </p:spPr>
+        <p:txBody>
+          <a:bodyPr wrap="square" lIns="0" tIns="0" rIns="0" bIns="0" rtlCol="0" anchor="ctr"/>
+          <a:lstStyle/>
+          <a:p>
+            <a:pPr algn="ctr" indent="0" marL="0">
+              <a:buNone/>
+            </a:pPr>
+            <a:r>
+              <a:rPr lang="en-US" sz="1000" dirty="0">
+                <a:solidFill>
+                  <a:srgbClr val="2E5B9F"/>
+                </a:solidFill>
+                <a:latin typeface="Arial" pitchFamily="34" charset="0"/>
+                <a:ea typeface="Arial" pitchFamily="34" charset="-122"/>
+                <a:cs typeface="Arial" pitchFamily="34" charset="-120"/>
+              </a:rPr>
+              <a:t>▶</a:t>
+            </a:r>
+            <a:endParaRPr lang="en-US" sz="1000" dirty="0"/>
+          </a:p>
+        </p:txBody>
+      </p:sp>
+      <p:sp>
+        <p:nvSpPr>
+          <p:cNvPr id="21" name="Shape 19"/>
+          <p:cNvSpPr/>
+          <p:nvPr/>
+        </p:nvSpPr>
+        <p:spPr>
+          <a:xfrm>
+            <a:off x="7635240" y="1371600"/>
+            <a:ext cx="1234440" cy="777240"/>
+          </a:xfrm>
+          <a:prstGeom prst="rect">
+            <a:avLst/>
+          </a:prstGeom>
+          <a:solidFill>
+            <a:srgbClr val="F2F2F2"/>
+          </a:solidFill>
+          <a:ln w="12700">
+            <a:solidFill>
+              <a:srgbClr val="2E5B9F"/>
+            </a:solidFill>
+            <a:prstDash val="solid"/>
+          </a:ln>
+        </p:spPr>
+      </p:sp>
+      <p:sp>
+        <p:nvSpPr>
+          <p:cNvPr id="22" name="Text 20"/>
+          <p:cNvSpPr/>
+          <p:nvPr/>
+        </p:nvSpPr>
+        <p:spPr>
+          <a:xfrm>
+            <a:off x="7635240" y="1371600"/>
+            <a:ext cx="1234440" cy="777240"/>
+          </a:xfrm>
+          <a:prstGeom prst="rect">
+            <a:avLst/>
+          </a:prstGeom>
+          <a:noFill/>
+          <a:ln/>
+        </p:spPr>
+        <p:txBody>
+          <a:bodyPr wrap="square" lIns="0" tIns="0" rIns="0" bIns="0" rtlCol="0" anchor="ctr"/>
+          <a:lstStyle/>
+          <a:p>
+            <a:pPr algn="ctr" indent="0" marL="0">
+              <a:buNone/>
+            </a:pPr>
+            <a:r>
+              <a:rPr lang="en-US" sz="850" b="1" dirty="0">
+                <a:solidFill>
+                  <a:srgbClr val="17365D"/>
+                </a:solidFill>
+                <a:latin typeface="Arial" pitchFamily="34" charset="0"/>
+                <a:ea typeface="Arial" pitchFamily="34" charset="-122"/>
+                <a:cs typeface="Arial" pitchFamily="34" charset="-120"/>
+              </a:rPr>
+              <a:t>UnLoader</a:t>
+            </a:r>
+            <a:endParaRPr lang="en-US" sz="850" dirty="0"/>
+          </a:p>
+          <a:p>
+            <a:pPr algn="ctr" indent="0" marL="0">
+              <a:buNone/>
+            </a:pPr>
+            <a:r>
+              <a:rPr lang="en-US" sz="850" b="1" dirty="0">
+                <a:solidFill>
+                  <a:srgbClr val="17365D"/>
+                </a:solidFill>
+                <a:latin typeface="Arial" pitchFamily="34" charset="0"/>
+                <a:ea typeface="Arial" pitchFamily="34" charset="-122"/>
+                <a:cs typeface="Arial" pitchFamily="34" charset="-120"/>
+              </a:rPr>
+              <a:t>(AWT-150U)</a:t>
+            </a:r>
+            <a:endParaRPr lang="en-US" sz="850" dirty="0"/>
+          </a:p>
+        </p:txBody>
+      </p:sp>
+      <p:sp>
+        <p:nvSpPr>
+          <p:cNvPr id="23" name="Text 21"/>
+          <p:cNvSpPr/>
+          <p:nvPr/>
+        </p:nvSpPr>
+        <p:spPr>
+          <a:xfrm>
+            <a:off x="457200" y="2286000"/>
+            <a:ext cx="8229600" cy="256032"/>
+          </a:xfrm>
+          <a:prstGeom prst="rect">
+            <a:avLst/>
+          </a:prstGeom>
+          <a:noFill/>
+          <a:ln/>
+        </p:spPr>
+        <p:txBody>
+          <a:bodyPr wrap="square" lIns="0" tIns="0" rIns="0" bIns="0" rtlCol="0" anchor="ctr"/>
+          <a:lstStyle/>
+          <a:p>
+            <a:pPr algn="l" indent="0" marL="0">
+              <a:buNone/>
+            </a:pPr>
+            <a:r>
+              <a:rPr lang="en-US" sz="900" i="1" dirty="0">
+                <a:solidFill>
+                  <a:srgbClr val="808080"/>
+                </a:solidFill>
+                <a:latin typeface="Arial" pitchFamily="34" charset="0"/>
+                <a:ea typeface="Arial" pitchFamily="34" charset="-122"/>
+                <a:cs typeface="Arial" pitchFamily="34" charset="-120"/>
+              </a:rPr>
+              <a:t>※ 코팅기 총 3대 + UV 경화기 1대 운용, 전/후단 컨베이어(Loader/UnLoader) 구성 — 설비 배치 순서는 확인 필요</a:t>
+            </a:r>
+            <a:endParaRPr lang="en-US" sz="900" dirty="0"/>
           </a:p>
         </p:txBody>
       </p:sp>
       <p:graphicFrame>
         <p:nvGraphicFramePr>
           <p:cNvPr id="2" name="Table 0"/>
+          <p:cNvGraphicFramePr>
+            <a:graphicFrameLocks noGrp="1"/>
+          </p:cNvGraphicFramePr>
+          <p:nvPr>
+            <p:extLst>
+              <p:ext uri="{D42A27DB-BD31-4B8C-83A1-F6EECF244321}">
+                <p14:modId xmlns:p14="http://schemas.microsoft.com/office/powerpoint/2010/main" val="1579011935"/>
+              </p:ext>
+            </p:extLst>
+          </p:nvPr>
+        </p:nvGraphicFramePr>
+        <p:xfrm>
+          <a:off x="548640" y="2743200"/>
+          <a:ext cx="7680960" cy="914400"/>
+        </p:xfrm>
+        <a:graphic>
+          <a:graphicData uri="http://schemas.openxmlformats.org/drawingml/2006/table">
+            <a:tbl>
+              <a:tblPr/>
+              <a:tblGrid>
+                <a:gridCol w="2011680"/>
+                <a:gridCol w="2011680"/>
+                <a:gridCol w="1097280"/>
+                <a:gridCol w="2560320"/>
+              </a:tblGrid>
+              <a:tr h="310896">
+                <a:tc>
+                  <a:txBody>
+                    <a:bodyPr/>
+                    <a:lstStyle/>
+                    <a:p>
+                      <a:pPr algn="ctr" indent="0" marL="0">
+                        <a:buNone/>
+                      </a:pPr>
+                      <a:r>
+                        <a:rPr lang="en-US" sz="1050" b="1" dirty="0">
+                          <a:solidFill>
+                            <a:srgbClr val="000000"/>
+                          </a:solidFill>
+                          <a:latin typeface="Arial" pitchFamily="34" charset="0"/>
+                          <a:ea typeface="Arial" pitchFamily="34" charset="-122"/>
+                          <a:cs typeface="Arial" pitchFamily="34" charset="-120"/>
+                        </a:rPr>
+                        <a:t>품목</a:t>
+                      </a:r>
+                      <a:endParaRPr lang="en-US" sz="1050" dirty="0">
+                        <a:latin typeface="Arial" charset="0"/>
+                        <a:ea typeface="Arial" charset="0"/>
+                        <a:cs typeface="Arial" charset="0"/>
+                      </a:endParaRPr>
+                    </a:p>
+                  </a:txBody>
+                  <a:tcPr marL="91440" marR="91440" marT="45720" marB="45720" anchor="ctr">
+                    <a:lnL w="9525" cap="flat" cmpd="sng" algn="ctr">
+                      <a:solidFill>
+                        <a:srgbClr val="808080"/>
+                      </a:solidFill>
+                      <a:prstDash val="solid"/>
+                      <a:round/>
+                      <a:headEnd type="none" w="med" len="med"/>
+                      <a:tailEnd type="none" w="med" len="med"/>
+                    </a:lnL>
+                    <a:lnR w="9525" cap="flat" cmpd="sng" algn="ctr">
+                      <a:solidFill>
+                        <a:srgbClr val="808080"/>
+                      </a:solidFill>
+                      <a:prstDash val="solid"/>
+                      <a:round/>
+                      <a:headEnd type="none" w="med" len="med"/>
+                      <a:tailEnd type="none" w="med" len="med"/>
+                    </a:lnR>
+                    <a:lnT w="9525" cap="flat" cmpd="sng" algn="ctr">
+                      <a:solidFill>
+                        <a:srgbClr val="808080"/>
+                      </a:solidFill>
+                      <a:prstDash val="solid"/>
+                      <a:round/>
+                      <a:headEnd type="none" w="med" len="med"/>
+                      <a:tailEnd type="none" w="med" len="med"/>
+                    </a:lnT>
+                    <a:lnB w="9525" cap="flat" cmpd="sng" algn="ctr">
+                      <a:solidFill>
+                        <a:srgbClr val="808080"/>
+                      </a:solidFill>
+                      <a:prstDash val="solid"/>
+                      <a:round/>
+                      <a:headEnd type="none" w="med" len="med"/>
+                      <a:tailEnd type="none" w="med" len="med"/>
+                    </a:lnB>
+                    <a:solidFill>
+                      <a:srgbClr val="DCE6F1"/>
+                    </a:solidFill>
+                  </a:tcPr>
+                </a:tc>
+                <a:tc>
+                  <a:txBody>
+                    <a:bodyPr/>
+                    <a:lstStyle/>
+                    <a:p>
+                      <a:pPr algn="ctr" indent="0" marL="0">
+                        <a:buNone/>
+                      </a:pPr>
+                      <a:r>
+                        <a:rPr lang="en-US" sz="1050" b="1" dirty="0">
+                          <a:solidFill>
+                            <a:srgbClr val="000000"/>
+                          </a:solidFill>
+                          <a:latin typeface="Arial" pitchFamily="34" charset="0"/>
+                          <a:ea typeface="Arial" pitchFamily="34" charset="-122"/>
+                          <a:cs typeface="Arial" pitchFamily="34" charset="-120"/>
+                        </a:rPr>
+                        <a:t>규격</a:t>
+                      </a:r>
+                      <a:endParaRPr lang="en-US" sz="1050" dirty="0">
+                        <a:latin typeface="Arial" charset="0"/>
+                        <a:ea typeface="Arial" charset="0"/>
+                        <a:cs typeface="Arial" charset="0"/>
+                      </a:endParaRPr>
+                    </a:p>
+                  </a:txBody>
+                  <a:tcPr marL="91440" marR="91440" marT="45720" marB="45720" anchor="ctr">
+                    <a:lnL w="9525" cap="flat" cmpd="sng" algn="ctr">
+                      <a:solidFill>
+                        <a:srgbClr val="808080"/>
+                      </a:solidFill>
+                      <a:prstDash val="solid"/>
+                      <a:round/>
+                      <a:headEnd type="none" w="med" len="med"/>
+                      <a:tailEnd type="none" w="med" len="med"/>
+                    </a:lnL>
+                    <a:lnR w="9525" cap="flat" cmpd="sng" algn="ctr">
+                      <a:solidFill>
+                        <a:srgbClr val="808080"/>
+                      </a:solidFill>
+                      <a:prstDash val="solid"/>
+                      <a:round/>
+                      <a:headEnd type="none" w="med" len="med"/>
+                      <a:tailEnd type="none" w="med" len="med"/>
+                    </a:lnR>
+                    <a:lnT w="9525" cap="flat" cmpd="sng" algn="ctr">
+                      <a:solidFill>
+                        <a:srgbClr val="808080"/>
+                      </a:solidFill>
+                      <a:prstDash val="solid"/>
+                      <a:round/>
+                      <a:headEnd type="none" w="med" len="med"/>
+                      <a:tailEnd type="none" w="med" len="med"/>
+                    </a:lnT>
+                    <a:lnB w="9525" cap="flat" cmpd="sng" algn="ctr">
+                      <a:solidFill>
+                        <a:srgbClr val="808080"/>
+                      </a:solidFill>
+                      <a:prstDash val="solid"/>
+                      <a:round/>
+                      <a:headEnd type="none" w="med" len="med"/>
+                      <a:tailEnd type="none" w="med" len="med"/>
+                    </a:lnB>
+                    <a:solidFill>
+                      <a:srgbClr val="DCE6F1"/>
+                    </a:solidFill>
+                  </a:tcPr>
+                </a:tc>
+                <a:tc>
+                  <a:txBody>
+                    <a:bodyPr/>
+                    <a:lstStyle/>
+                    <a:p>
+                      <a:pPr algn="ctr" indent="0" marL="0">
+                        <a:buNone/>
+                      </a:pPr>
+                      <a:r>
+                        <a:rPr lang="en-US" sz="1050" b="1" dirty="0">
+                          <a:solidFill>
+                            <a:srgbClr val="000000"/>
+                          </a:solidFill>
+                          <a:latin typeface="Arial" pitchFamily="34" charset="0"/>
+                          <a:ea typeface="Arial" pitchFamily="34" charset="-122"/>
+                          <a:cs typeface="Arial" pitchFamily="34" charset="-120"/>
+                        </a:rPr>
+                        <a:t>수량</a:t>
+                      </a:r>
+                      <a:endParaRPr lang="en-US" sz="1050" dirty="0">
+                        <a:latin typeface="Arial" charset="0"/>
+                        <a:ea typeface="Arial" charset="0"/>
+                        <a:cs typeface="Arial" charset="0"/>
+                      </a:endParaRPr>
+                    </a:p>
+                  </a:txBody>
+                  <a:tcPr marL="91440" marR="91440" marT="45720" marB="45720" anchor="ctr">
+                    <a:lnL w="9525" cap="flat" cmpd="sng" algn="ctr">
+                      <a:solidFill>
+                        <a:srgbClr val="808080"/>
+                      </a:solidFill>
+                      <a:prstDash val="solid"/>
+                      <a:round/>
+                      <a:headEnd type="none" w="med" len="med"/>
+                      <a:tailEnd type="none" w="med" len="med"/>
+                    </a:lnL>
+                    <a:lnR w="9525" cap="flat" cmpd="sng" algn="ctr">
+                      <a:solidFill>
+                        <a:srgbClr val="808080"/>
+                      </a:solidFill>
+                      <a:prstDash val="solid"/>
+                      <a:round/>
+                      <a:headEnd type="none" w="med" len="med"/>
+                      <a:tailEnd type="none" w="med" len="med"/>
+                    </a:lnR>
+                    <a:lnT w="9525" cap="flat" cmpd="sng" algn="ctr">
+                      <a:solidFill>
+                        <a:srgbClr val="808080"/>
+                      </a:solidFill>
+                      <a:prstDash val="solid"/>
+                      <a:round/>
+                      <a:headEnd type="none" w="med" len="med"/>
+                      <a:tailEnd type="none" w="med" len="med"/>
+                    </a:lnT>
+                    <a:lnB w="9525" cap="flat" cmpd="sng" algn="ctr">
+                      <a:solidFill>
+                        <a:srgbClr val="808080"/>
+                      </a:solidFill>
+                      <a:prstDash val="solid"/>
+                      <a:round/>
+                      <a:headEnd type="none" w="med" len="med"/>
+                      <a:tailEnd type="none" w="med" len="med"/>
+                    </a:lnB>
+                    <a:solidFill>
+                      <a:srgbClr val="DCE6F1"/>
+                    </a:solidFill>
+                  </a:tcPr>
+                </a:tc>
+                <a:tc>
+                  <a:txBody>
+                    <a:bodyPr/>
+                    <a:lstStyle/>
+                    <a:p>
+                      <a:pPr algn="ctr" indent="0" marL="0">
+                        <a:buNone/>
+                      </a:pPr>
+                      <a:r>
+                        <a:rPr lang="en-US" sz="1050" b="1" dirty="0">
+                          <a:solidFill>
+                            <a:srgbClr val="000000"/>
+                          </a:solidFill>
+                          <a:latin typeface="Arial" pitchFamily="34" charset="0"/>
+                          <a:ea typeface="Arial" pitchFamily="34" charset="-122"/>
+                          <a:cs typeface="Arial" pitchFamily="34" charset="-120"/>
+                        </a:rPr>
+                        <a:t>비고</a:t>
+                      </a:r>
+                      <a:endParaRPr lang="en-US" sz="1050" dirty="0">
+                        <a:latin typeface="Arial" charset="0"/>
+                        <a:ea typeface="Arial" charset="0"/>
+                        <a:cs typeface="Arial" charset="0"/>
+                      </a:endParaRPr>
+                    </a:p>
+                  </a:txBody>
+                  <a:tcPr marL="91440" marR="91440" marT="45720" marB="45720" anchor="ctr">
+                    <a:lnL w="9525" cap="flat" cmpd="sng" algn="ctr">
+                      <a:solidFill>
+                        <a:srgbClr val="808080"/>
+                      </a:solidFill>
+                      <a:prstDash val="solid"/>
+                      <a:round/>
+                      <a:headEnd type="none" w="med" len="med"/>
+                      <a:tailEnd type="none" w="med" len="med"/>
+                    </a:lnL>
+                    <a:lnR w="9525" cap="flat" cmpd="sng" algn="ctr">
+                      <a:solidFill>
+                        <a:srgbClr val="808080"/>
+                      </a:solidFill>
+                      <a:prstDash val="solid"/>
+                      <a:round/>
+                      <a:headEnd type="none" w="med" len="med"/>
+                      <a:tailEnd type="none" w="med" len="med"/>
+                    </a:lnR>
+                    <a:lnT w="9525" cap="flat" cmpd="sng" algn="ctr">
+                      <a:solidFill>
+                        <a:srgbClr val="808080"/>
+                      </a:solidFill>
+                      <a:prstDash val="solid"/>
+                      <a:round/>
+                      <a:headEnd type="none" w="med" len="med"/>
+                      <a:tailEnd type="none" w="med" len="med"/>
+                    </a:lnT>
+                    <a:lnB w="9525" cap="flat" cmpd="sng" algn="ctr">
+                      <a:solidFill>
+                        <a:srgbClr val="808080"/>
+                      </a:solidFill>
+                      <a:prstDash val="solid"/>
+                      <a:round/>
+                      <a:headEnd type="none" w="med" len="med"/>
+                      <a:tailEnd type="none" w="med" len="med"/>
+                    </a:lnB>
+                    <a:solidFill>
+                      <a:srgbClr val="DCE6F1"/>
+                    </a:solidFill>
+                  </a:tcPr>
+                </a:tc>
+              </a:tr>
+              <a:tr h="310896">
+                <a:tc>
+                  <a:txBody>
+                    <a:bodyPr/>
+                    <a:lstStyle/>
+                    <a:p>
+                      <a:pPr algn="ctr" indent="0" marL="0">
+                        <a:buNone/>
+                      </a:pPr>
+                      <a:r>
+                        <a:rPr lang="en-US" sz="1050" dirty="0">
+                          <a:solidFill>
+                            <a:srgbClr val="000000"/>
+                          </a:solidFill>
+                          <a:latin typeface="Arial" pitchFamily="34" charset="0"/>
+                          <a:ea typeface="Arial" pitchFamily="34" charset="-122"/>
+                          <a:cs typeface="Arial" pitchFamily="34" charset="-120"/>
+                        </a:rPr>
+                        <a:t>일반 코팅기</a:t>
+                      </a:r>
+                      <a:endParaRPr lang="en-US" sz="1050" dirty="0">
+                        <a:latin typeface="Arial" charset="0"/>
+                        <a:ea typeface="Arial" charset="0"/>
+                        <a:cs typeface="Arial" charset="0"/>
+                      </a:endParaRPr>
+                    </a:p>
+                  </a:txBody>
+                  <a:tcPr marL="91440" marR="91440" marT="45720" marB="45720" anchor="ctr">
+                    <a:lnL w="9525" cap="flat" cmpd="sng" algn="ctr">
+                      <a:solidFill>
+                        <a:srgbClr val="808080"/>
+                      </a:solidFill>
+                      <a:prstDash val="solid"/>
+                      <a:round/>
+                      <a:headEnd type="none" w="med" len="med"/>
+                      <a:tailEnd type="none" w="med" len="med"/>
+                    </a:lnL>
+                    <a:lnR w="9525" cap="flat" cmpd="sng" algn="ctr">
+                      <a:solidFill>
+                        <a:srgbClr val="808080"/>
+                      </a:solidFill>
+                      <a:prstDash val="solid"/>
+                      <a:round/>
+                      <a:headEnd type="none" w="med" len="med"/>
+                      <a:tailEnd type="none" w="med" len="med"/>
+                    </a:lnR>
+                    <a:lnT w="9525" cap="flat" cmpd="sng" algn="ctr">
+                      <a:solidFill>
+                        <a:srgbClr val="808080"/>
+                      </a:solidFill>
+                      <a:prstDash val="solid"/>
+                      <a:round/>
+                      <a:headEnd type="none" w="med" len="med"/>
+                      <a:tailEnd type="none" w="med" len="med"/>
+                    </a:lnT>
+                    <a:lnB w="9525" cap="flat" cmpd="sng" algn="ctr">
+                      <a:solidFill>
+                        <a:srgbClr val="808080"/>
+                      </a:solidFill>
+                      <a:prstDash val="solid"/>
+                      <a:round/>
+                      <a:headEnd type="none" w="med" len="med"/>
+                      <a:tailEnd type="none" w="med" len="med"/>
+                    </a:lnB>
+                    <a:solidFill>
+                      <a:srgbClr val="FFFFFF"/>
+                    </a:solidFill>
+                  </a:tcPr>
+                </a:tc>
+                <a:tc>
+                  <a:txBody>
+                    <a:bodyPr/>
+                    <a:lstStyle/>
+                    <a:p>
+                      <a:pPr algn="ctr" indent="0" marL="0">
+                        <a:buNone/>
+                      </a:pPr>
+                      <a:r>
+                        <a:rPr lang="en-US" sz="1050" dirty="0">
+                          <a:solidFill>
+                            <a:srgbClr val="000000"/>
+                          </a:solidFill>
+                          <a:latin typeface="Arial" pitchFamily="34" charset="0"/>
+                          <a:ea typeface="Arial" pitchFamily="34" charset="-122"/>
+                          <a:cs typeface="Arial" pitchFamily="34" charset="-120"/>
+                        </a:rPr>
+                        <a:t>Mi-1400</a:t>
+                      </a:r>
+                      <a:endParaRPr lang="en-US" sz="1050" dirty="0">
+                        <a:latin typeface="Arial" charset="0"/>
+                        <a:ea typeface="Arial" charset="0"/>
+                        <a:cs typeface="Arial" charset="0"/>
+                      </a:endParaRPr>
+                    </a:p>
+                  </a:txBody>
+                  <a:tcPr marL="91440" marR="91440" marT="45720" marB="45720" anchor="ctr">
+                    <a:lnL w="9525" cap="flat" cmpd="sng" algn="ctr">
+                      <a:solidFill>
+                        <a:srgbClr val="808080"/>
+                      </a:solidFill>
+                      <a:prstDash val="solid"/>
+                      <a:round/>
+                      <a:headEnd type="none" w="med" len="med"/>
+                      <a:tailEnd type="none" w="med" len="med"/>
+                    </a:lnL>
+                    <a:lnR w="9525" cap="flat" cmpd="sng" algn="ctr">
+                      <a:solidFill>
+                        <a:srgbClr val="808080"/>
+                      </a:solidFill>
+                      <a:prstDash val="solid"/>
+                      <a:round/>
+                      <a:headEnd type="none" w="med" len="med"/>
+                      <a:tailEnd type="none" w="med" len="med"/>
+                    </a:lnR>
+                    <a:lnT w="9525" cap="flat" cmpd="sng" algn="ctr">
+                      <a:solidFill>
+                        <a:srgbClr val="808080"/>
+                      </a:solidFill>
+                      <a:prstDash val="solid"/>
+                      <a:round/>
+                      <a:headEnd type="none" w="med" len="med"/>
+                      <a:tailEnd type="none" w="med" len="med"/>
+                    </a:lnT>
+                    <a:lnB w="9525" cap="flat" cmpd="sng" algn="ctr">
+                      <a:solidFill>
+                        <a:srgbClr val="808080"/>
+                      </a:solidFill>
+                      <a:prstDash val="solid"/>
+                      <a:round/>
+                      <a:headEnd type="none" w="med" len="med"/>
+                      <a:tailEnd type="none" w="med" len="med"/>
+                    </a:lnB>
+                    <a:solidFill>
+                      <a:srgbClr val="FFFFFF"/>
+                    </a:solidFill>
+                  </a:tcPr>
+                </a:tc>
+                <a:tc>
+                  <a:txBody>
+                    <a:bodyPr/>
+                    <a:lstStyle/>
+                    <a:p>
+                      <a:pPr algn="ctr" indent="0" marL="0">
+                        <a:buNone/>
+                      </a:pPr>
+                      <a:r>
+                        <a:rPr lang="en-US" sz="1050" dirty="0">
+                          <a:solidFill>
+                            <a:srgbClr val="000000"/>
+                          </a:solidFill>
+                          <a:latin typeface="Arial" pitchFamily="34" charset="0"/>
+                          <a:ea typeface="Arial" pitchFamily="34" charset="-122"/>
+                          <a:cs typeface="Arial" pitchFamily="34" charset="-120"/>
+                        </a:rPr>
+                        <a:t>2</a:t>
+                      </a:r>
+                      <a:endParaRPr lang="en-US" sz="1050" dirty="0">
+                        <a:latin typeface="Arial" charset="0"/>
+                        <a:ea typeface="Arial" charset="0"/>
+                        <a:cs typeface="Arial" charset="0"/>
+                      </a:endParaRPr>
+                    </a:p>
+                  </a:txBody>
+                  <a:tcPr marL="91440" marR="91440" marT="45720" marB="45720" anchor="ctr">
+                    <a:lnL w="9525" cap="flat" cmpd="sng" algn="ctr">
+                      <a:solidFill>
+                        <a:srgbClr val="808080"/>
+                      </a:solidFill>
+                      <a:prstDash val="solid"/>
+                      <a:round/>
+                      <a:headEnd type="none" w="med" len="med"/>
+                      <a:tailEnd type="none" w="med" len="med"/>
+                    </a:lnL>
+                    <a:lnR w="9525" cap="flat" cmpd="sng" algn="ctr">
+                      <a:solidFill>
+                        <a:srgbClr val="808080"/>
+                      </a:solidFill>
+                      <a:prstDash val="solid"/>
+                      <a:round/>
+                      <a:headEnd type="none" w="med" len="med"/>
+                      <a:tailEnd type="none" w="med" len="med"/>
+                    </a:lnR>
+                    <a:lnT w="9525" cap="flat" cmpd="sng" algn="ctr">
+                      <a:solidFill>
+                        <a:srgbClr val="808080"/>
+                      </a:solidFill>
+                      <a:prstDash val="solid"/>
+                      <a:round/>
+                      <a:headEnd type="none" w="med" len="med"/>
+                      <a:tailEnd type="none" w="med" len="med"/>
+                    </a:lnT>
+                    <a:lnB w="9525" cap="flat" cmpd="sng" algn="ctr">
+                      <a:solidFill>
+                        <a:srgbClr val="808080"/>
+                      </a:solidFill>
+                      <a:prstDash val="solid"/>
+                      <a:round/>
+                      <a:headEnd type="none" w="med" len="med"/>
+                      <a:tailEnd type="none" w="med" len="med"/>
+                    </a:lnB>
+                    <a:solidFill>
+                      <a:srgbClr val="FFFFFF"/>
+                    </a:solidFill>
+                  </a:tcPr>
+                </a:tc>
+                <a:tc>
+                  <a:txBody>
+                    <a:bodyPr/>
+                    <a:lstStyle/>
+                    <a:p>
+                      <a:pPr algn="ctr" indent="0" marL="0">
+                        <a:buNone/>
+                      </a:pPr>
+                      <a:endParaRPr lang="en-US" sz="1050" dirty="0">
+                        <a:latin typeface="Arial" charset="0"/>
+                        <a:ea typeface="Arial" charset="0"/>
+                        <a:cs typeface="Arial" charset="0"/>
+                      </a:endParaRPr>
+                    </a:p>
+                  </a:txBody>
+                  <a:tcPr marL="91440" marR="91440" marT="45720" marB="45720" anchor="ctr">
+                    <a:lnL w="9525" cap="flat" cmpd="sng" algn="ctr">
+                      <a:solidFill>
+                        <a:srgbClr val="808080"/>
+                      </a:solidFill>
+                      <a:prstDash val="solid"/>
+                      <a:round/>
+                      <a:headEnd type="none" w="med" len="med"/>
+                      <a:tailEnd type="none" w="med" len="med"/>
+                    </a:lnL>
+                    <a:lnR w="9525" cap="flat" cmpd="sng" algn="ctr">
+                      <a:solidFill>
+                        <a:srgbClr val="808080"/>
+                      </a:solidFill>
+                      <a:prstDash val="solid"/>
+                      <a:round/>
+                      <a:headEnd type="none" w="med" len="med"/>
+                      <a:tailEnd type="none" w="med" len="med"/>
+                    </a:lnR>
+                    <a:lnT w="9525" cap="flat" cmpd="sng" algn="ctr">
+                      <a:solidFill>
+                        <a:srgbClr val="808080"/>
+                      </a:solidFill>
+                      <a:prstDash val="solid"/>
+                      <a:round/>
+                      <a:headEnd type="none" w="med" len="med"/>
+                      <a:tailEnd type="none" w="med" len="med"/>
+                    </a:lnT>
+                    <a:lnB w="9525" cap="flat" cmpd="sng" algn="ctr">
+                      <a:solidFill>
+                        <a:srgbClr val="808080"/>
+                      </a:solidFill>
+                      <a:prstDash val="solid"/>
+                      <a:round/>
+                      <a:headEnd type="none" w="med" len="med"/>
+                      <a:tailEnd type="none" w="med" len="med"/>
+                    </a:lnB>
+                    <a:solidFill>
+                      <a:srgbClr val="FFFFFF"/>
+                    </a:solidFill>
+                  </a:tcPr>
+                </a:tc>
+              </a:tr>
+              <a:tr h="310896">
+                <a:tc>
+                  <a:txBody>
+                    <a:bodyPr/>
+                    <a:lstStyle/>
+                    <a:p>
+                      <a:pPr algn="ctr" indent="0" marL="0">
+                        <a:buNone/>
+                      </a:pPr>
+                      <a:r>
+                        <a:rPr lang="en-US" sz="1050" dirty="0">
+                          <a:solidFill>
+                            <a:srgbClr val="000000"/>
+                          </a:solidFill>
+                          <a:latin typeface="Arial" pitchFamily="34" charset="0"/>
+                          <a:ea typeface="Arial" pitchFamily="34" charset="-122"/>
+                          <a:cs typeface="Arial" pitchFamily="34" charset="-120"/>
+                        </a:rPr>
+                        <a:t>Tilt 코팅기</a:t>
+                      </a:r>
+                      <a:endParaRPr lang="en-US" sz="1050" dirty="0">
+                        <a:latin typeface="Arial" charset="0"/>
+                        <a:ea typeface="Arial" charset="0"/>
+                        <a:cs typeface="Arial" charset="0"/>
+                      </a:endParaRPr>
+                    </a:p>
+                  </a:txBody>
+                  <a:tcPr marL="91440" marR="91440" marT="45720" marB="45720" anchor="ctr">
+                    <a:lnL w="9525" cap="flat" cmpd="sng" algn="ctr">
+                      <a:solidFill>
+                        <a:srgbClr val="808080"/>
+                      </a:solidFill>
+                      <a:prstDash val="solid"/>
+                      <a:round/>
+                      <a:headEnd type="none" w="med" len="med"/>
+                      <a:tailEnd type="none" w="med" len="med"/>
+                    </a:lnL>
+                    <a:lnR w="9525" cap="flat" cmpd="sng" algn="ctr">
+                      <a:solidFill>
+                        <a:srgbClr val="808080"/>
+                      </a:solidFill>
+                      <a:prstDash val="solid"/>
+                      <a:round/>
+                      <a:headEnd type="none" w="med" len="med"/>
+                      <a:tailEnd type="none" w="med" len="med"/>
+                    </a:lnR>
+                    <a:lnT w="9525" cap="flat" cmpd="sng" algn="ctr">
+                      <a:solidFill>
+                        <a:srgbClr val="808080"/>
+                      </a:solidFill>
+                      <a:prstDash val="solid"/>
+                      <a:round/>
+                      <a:headEnd type="none" w="med" len="med"/>
+                      <a:tailEnd type="none" w="med" len="med"/>
+                    </a:lnT>
+                    <a:lnB w="9525" cap="flat" cmpd="sng" algn="ctr">
+                      <a:solidFill>
+                        <a:srgbClr val="808080"/>
+                      </a:solidFill>
+                      <a:prstDash val="solid"/>
+                      <a:round/>
+                      <a:headEnd type="none" w="med" len="med"/>
+                      <a:tailEnd type="none" w="med" len="med"/>
+                    </a:lnB>
+                    <a:solidFill>
+                      <a:srgbClr val="FFFFFF"/>
+                    </a:solidFill>
+                  </a:tcPr>
+                </a:tc>
+                <a:tc>
+                  <a:txBody>
+                    <a:bodyPr/>
+                    <a:lstStyle/>
+                    <a:p>
+                      <a:pPr algn="ctr" indent="0" marL="0">
+                        <a:buNone/>
+                      </a:pPr>
+                      <a:r>
+                        <a:rPr lang="en-US" sz="1050" dirty="0">
+                          <a:solidFill>
+                            <a:srgbClr val="000000"/>
+                          </a:solidFill>
+                          <a:latin typeface="Arial" pitchFamily="34" charset="0"/>
+                          <a:ea typeface="Arial" pitchFamily="34" charset="-122"/>
+                          <a:cs typeface="Arial" pitchFamily="34" charset="-120"/>
+                        </a:rPr>
+                        <a:t>Mi-1600TG</a:t>
+                      </a:r>
+                      <a:endParaRPr lang="en-US" sz="1050" dirty="0">
+                        <a:latin typeface="Arial" charset="0"/>
+                        <a:ea typeface="Arial" charset="0"/>
+                        <a:cs typeface="Arial" charset="0"/>
+                      </a:endParaRPr>
+                    </a:p>
+                  </a:txBody>
+                  <a:tcPr marL="91440" marR="91440" marT="45720" marB="45720" anchor="ctr">
+                    <a:lnL w="9525" cap="flat" cmpd="sng" algn="ctr">
+                      <a:solidFill>
+                        <a:srgbClr val="808080"/>
+                      </a:solidFill>
+                      <a:prstDash val="solid"/>
+                      <a:round/>
+                      <a:headEnd type="none" w="med" len="med"/>
+                      <a:tailEnd type="none" w="med" len="med"/>
+                    </a:lnL>
+                    <a:lnR w="9525" cap="flat" cmpd="sng" algn="ctr">
+                      <a:solidFill>
+                        <a:srgbClr val="808080"/>
+                      </a:solidFill>
+                      <a:prstDash val="solid"/>
+                      <a:round/>
+                      <a:headEnd type="none" w="med" len="med"/>
+                      <a:tailEnd type="none" w="med" len="med"/>
+                    </a:lnR>
+                    <a:lnT w="9525" cap="flat" cmpd="sng" algn="ctr">
+                      <a:solidFill>
+                        <a:srgbClr val="808080"/>
+                      </a:solidFill>
+                      <a:prstDash val="solid"/>
+                      <a:round/>
+                      <a:headEnd type="none" w="med" len="med"/>
+                      <a:tailEnd type="none" w="med" len="med"/>
+                    </a:lnT>
+                    <a:lnB w="9525" cap="flat" cmpd="sng" algn="ctr">
+                      <a:solidFill>
+                        <a:srgbClr val="808080"/>
+                      </a:solidFill>
+                      <a:prstDash val="solid"/>
+                      <a:round/>
+                      <a:headEnd type="none" w="med" len="med"/>
+                      <a:tailEnd type="none" w="med" len="med"/>
+                    </a:lnB>
+                    <a:solidFill>
+                      <a:srgbClr val="FFFFFF"/>
+                    </a:solidFill>
+                  </a:tcPr>
+                </a:tc>
+                <a:tc>
+                  <a:txBody>
+                    <a:bodyPr/>
+                    <a:lstStyle/>
+                    <a:p>
+                      <a:pPr algn="ctr" indent="0" marL="0">
+                        <a:buNone/>
+                      </a:pPr>
+                      <a:r>
+                        <a:rPr lang="en-US" sz="1050" dirty="0">
+                          <a:solidFill>
+                            <a:srgbClr val="000000"/>
+                          </a:solidFill>
+                          <a:latin typeface="Arial" pitchFamily="34" charset="0"/>
+                          <a:ea typeface="Arial" pitchFamily="34" charset="-122"/>
+                          <a:cs typeface="Arial" pitchFamily="34" charset="-120"/>
+                        </a:rPr>
+                        <a:t>1</a:t>
+                      </a:r>
+                      <a:endParaRPr lang="en-US" sz="1050" dirty="0">
+                        <a:latin typeface="Arial" charset="0"/>
+                        <a:ea typeface="Arial" charset="0"/>
+                        <a:cs typeface="Arial" charset="0"/>
+                      </a:endParaRPr>
+                    </a:p>
+                  </a:txBody>
+                  <a:tcPr marL="91440" marR="91440" marT="45720" marB="45720" anchor="ctr">
+                    <a:lnL w="9525" cap="flat" cmpd="sng" algn="ctr">
+                      <a:solidFill>
+                        <a:srgbClr val="808080"/>
+                      </a:solidFill>
+                      <a:prstDash val="solid"/>
+                      <a:round/>
+                      <a:headEnd type="none" w="med" len="med"/>
+                      <a:tailEnd type="none" w="med" len="med"/>
+                    </a:lnL>
+                    <a:lnR w="9525" cap="flat" cmpd="sng" algn="ctr">
+                      <a:solidFill>
+                        <a:srgbClr val="808080"/>
+                      </a:solidFill>
+                      <a:prstDash val="solid"/>
+                      <a:round/>
+                      <a:headEnd type="none" w="med" len="med"/>
+                      <a:tailEnd type="none" w="med" len="med"/>
+                    </a:lnR>
+                    <a:lnT w="9525" cap="flat" cmpd="sng" algn="ctr">
+                      <a:solidFill>
+                        <a:srgbClr val="808080"/>
+                      </a:solidFill>
+                      <a:prstDash val="solid"/>
+                      <a:round/>
+                      <a:headEnd type="none" w="med" len="med"/>
+                      <a:tailEnd type="none" w="med" len="med"/>
+                    </a:lnT>
+                    <a:lnB w="9525" cap="flat" cmpd="sng" algn="ctr">
+                      <a:solidFill>
+                        <a:srgbClr val="808080"/>
+                      </a:solidFill>
+                      <a:prstDash val="solid"/>
+                      <a:round/>
+                      <a:headEnd type="none" w="med" len="med"/>
+                      <a:tailEnd type="none" w="med" len="med"/>
+                    </a:lnB>
+                    <a:solidFill>
+                      <a:srgbClr val="FFFFFF"/>
+                    </a:solidFill>
+                  </a:tcPr>
+                </a:tc>
+                <a:tc>
+                  <a:txBody>
+                    <a:bodyPr/>
+                    <a:lstStyle/>
+                    <a:p>
+                      <a:pPr algn="ctr" indent="0" marL="0">
+                        <a:buNone/>
+                      </a:pPr>
+                      <a:endParaRPr lang="en-US" sz="1050" dirty="0">
+                        <a:latin typeface="Arial" charset="0"/>
+                        <a:ea typeface="Arial" charset="0"/>
+                        <a:cs typeface="Arial" charset="0"/>
+                      </a:endParaRPr>
+                    </a:p>
+                  </a:txBody>
+                  <a:tcPr marL="91440" marR="91440" marT="45720" marB="45720" anchor="ctr">
+                    <a:lnL w="9525" cap="flat" cmpd="sng" algn="ctr">
+                      <a:solidFill>
+                        <a:srgbClr val="808080"/>
+                      </a:solidFill>
+                      <a:prstDash val="solid"/>
+                      <a:round/>
+                      <a:headEnd type="none" w="med" len="med"/>
+                      <a:tailEnd type="none" w="med" len="med"/>
+                    </a:lnL>
+                    <a:lnR w="9525" cap="flat" cmpd="sng" algn="ctr">
+                      <a:solidFill>
+                        <a:srgbClr val="808080"/>
+                      </a:solidFill>
+                      <a:prstDash val="solid"/>
+                      <a:round/>
+                      <a:headEnd type="none" w="med" len="med"/>
+                      <a:tailEnd type="none" w="med" len="med"/>
+                    </a:lnR>
+                    <a:lnT w="9525" cap="flat" cmpd="sng" algn="ctr">
+                      <a:solidFill>
+                        <a:srgbClr val="808080"/>
+                      </a:solidFill>
+                      <a:prstDash val="solid"/>
+                      <a:round/>
+                      <a:headEnd type="none" w="med" len="med"/>
+                      <a:tailEnd type="none" w="med" len="med"/>
+                    </a:lnT>
+                    <a:lnB w="9525" cap="flat" cmpd="sng" algn="ctr">
+                      <a:solidFill>
+                        <a:srgbClr val="808080"/>
+                      </a:solidFill>
+                      <a:prstDash val="solid"/>
+                      <a:round/>
+                      <a:headEnd type="none" w="med" len="med"/>
+                      <a:tailEnd type="none" w="med" len="med"/>
+                    </a:lnB>
+                    <a:solidFill>
+                      <a:srgbClr val="FFFFFF"/>
+                    </a:solidFill>
+                  </a:tcPr>
+                </a:tc>
+              </a:tr>
+              <a:tr h="310896">
+                <a:tc>
+                  <a:txBody>
+                    <a:bodyPr/>
+                    <a:lstStyle/>
+                    <a:p>
+                      <a:pPr algn="ctr" indent="0" marL="0">
+                        <a:buNone/>
+                      </a:pPr>
+                      <a:r>
+                        <a:rPr lang="en-US" sz="1050" dirty="0">
+                          <a:solidFill>
+                            <a:srgbClr val="000000"/>
+                          </a:solidFill>
+                          <a:latin typeface="Arial" pitchFamily="34" charset="0"/>
+                          <a:ea typeface="Arial" pitchFamily="34" charset="-122"/>
+                          <a:cs typeface="Arial" pitchFamily="34" charset="-120"/>
+                        </a:rPr>
+                        <a:t>UV 경화기</a:t>
+                      </a:r>
+                      <a:endParaRPr lang="en-US" sz="1050" dirty="0">
+                        <a:latin typeface="Arial" charset="0"/>
+                        <a:ea typeface="Arial" charset="0"/>
+                        <a:cs typeface="Arial" charset="0"/>
+                      </a:endParaRPr>
+                    </a:p>
+                  </a:txBody>
+                  <a:tcPr marL="91440" marR="91440" marT="45720" marB="45720" anchor="ctr">
+                    <a:lnL w="9525" cap="flat" cmpd="sng" algn="ctr">
+                      <a:solidFill>
+                        <a:srgbClr val="808080"/>
+                      </a:solidFill>
+                      <a:prstDash val="solid"/>
+                      <a:round/>
+                      <a:headEnd type="none" w="med" len="med"/>
+                      <a:tailEnd type="none" w="med" len="med"/>
+                    </a:lnL>
+                    <a:lnR w="9525" cap="flat" cmpd="sng" algn="ctr">
+                      <a:solidFill>
+                        <a:srgbClr val="808080"/>
+                      </a:solidFill>
+                      <a:prstDash val="solid"/>
+                      <a:round/>
+                      <a:headEnd type="none" w="med" len="med"/>
+                      <a:tailEnd type="none" w="med" len="med"/>
+                    </a:lnR>
+                    <a:lnT w="9525" cap="flat" cmpd="sng" algn="ctr">
+                      <a:solidFill>
+                        <a:srgbClr val="808080"/>
+                      </a:solidFill>
+                      <a:prstDash val="solid"/>
+                      <a:round/>
+                      <a:headEnd type="none" w="med" len="med"/>
+                      <a:tailEnd type="none" w="med" len="med"/>
+                    </a:lnT>
+                    <a:lnB w="9525" cap="flat" cmpd="sng" algn="ctr">
+                      <a:solidFill>
+                        <a:srgbClr val="808080"/>
+                      </a:solidFill>
+                      <a:prstDash val="solid"/>
+                      <a:round/>
+                      <a:headEnd type="none" w="med" len="med"/>
+                      <a:tailEnd type="none" w="med" len="med"/>
+                    </a:lnB>
+                    <a:solidFill>
+                      <a:srgbClr val="FFFFFF"/>
+                    </a:solidFill>
+                  </a:tcPr>
+                </a:tc>
+                <a:tc>
+                  <a:txBody>
+                    <a:bodyPr/>
+                    <a:lstStyle/>
+                    <a:p>
+                      <a:pPr algn="ctr" indent="0" marL="0">
+                        <a:buNone/>
+                      </a:pPr>
+                      <a:r>
+                        <a:rPr lang="en-US" sz="1050" dirty="0">
+                          <a:solidFill>
+                            <a:srgbClr val="000000"/>
+                          </a:solidFill>
+                          <a:latin typeface="Arial" pitchFamily="34" charset="0"/>
+                          <a:ea typeface="Arial" pitchFamily="34" charset="-122"/>
+                          <a:cs typeface="Arial" pitchFamily="34" charset="-120"/>
+                        </a:rPr>
+                        <a:t>MC-2000UV</a:t>
+                      </a:r>
+                      <a:endParaRPr lang="en-US" sz="1050" dirty="0">
+                        <a:latin typeface="Arial" charset="0"/>
+                        <a:ea typeface="Arial" charset="0"/>
+                        <a:cs typeface="Arial" charset="0"/>
+                      </a:endParaRPr>
+                    </a:p>
+                  </a:txBody>
+                  <a:tcPr marL="91440" marR="91440" marT="45720" marB="45720" anchor="ctr">
+                    <a:lnL w="9525" cap="flat" cmpd="sng" algn="ctr">
+                      <a:solidFill>
+                        <a:srgbClr val="808080"/>
+                      </a:solidFill>
+                      <a:prstDash val="solid"/>
+                      <a:round/>
+                      <a:headEnd type="none" w="med" len="med"/>
+                      <a:tailEnd type="none" w="med" len="med"/>
+                    </a:lnL>
+                    <a:lnR w="9525" cap="flat" cmpd="sng" algn="ctr">
+                      <a:solidFill>
+                        <a:srgbClr val="808080"/>
+                      </a:solidFill>
+                      <a:prstDash val="solid"/>
+                      <a:round/>
+                      <a:headEnd type="none" w="med" len="med"/>
+                      <a:tailEnd type="none" w="med" len="med"/>
+                    </a:lnR>
+                    <a:lnT w="9525" cap="flat" cmpd="sng" algn="ctr">
+                      <a:solidFill>
+                        <a:srgbClr val="808080"/>
+                      </a:solidFill>
+                      <a:prstDash val="solid"/>
+                      <a:round/>
+                      <a:headEnd type="none" w="med" len="med"/>
+                      <a:tailEnd type="none" w="med" len="med"/>
+                    </a:lnT>
+                    <a:lnB w="9525" cap="flat" cmpd="sng" algn="ctr">
+                      <a:solidFill>
+                        <a:srgbClr val="808080"/>
+                      </a:solidFill>
+                      <a:prstDash val="solid"/>
+                      <a:round/>
+                      <a:headEnd type="none" w="med" len="med"/>
+                      <a:tailEnd type="none" w="med" len="med"/>
+                    </a:lnB>
+                    <a:solidFill>
+                      <a:srgbClr val="FFFFFF"/>
+                    </a:solidFill>
+                  </a:tcPr>
+                </a:tc>
+                <a:tc>
+                  <a:txBody>
+                    <a:bodyPr/>
+                    <a:lstStyle/>
+                    <a:p>
+                      <a:pPr algn="ctr" indent="0" marL="0">
+                        <a:buNone/>
+                      </a:pPr>
+                      <a:r>
+                        <a:rPr lang="en-US" sz="1050" dirty="0">
+                          <a:solidFill>
+                            <a:srgbClr val="000000"/>
+                          </a:solidFill>
+                          <a:latin typeface="Arial" pitchFamily="34" charset="0"/>
+                          <a:ea typeface="Arial" pitchFamily="34" charset="-122"/>
+                          <a:cs typeface="Arial" pitchFamily="34" charset="-120"/>
+                        </a:rPr>
+                        <a:t>1</a:t>
+                      </a:r>
+                      <a:endParaRPr lang="en-US" sz="1050" dirty="0">
+                        <a:latin typeface="Arial" charset="0"/>
+                        <a:ea typeface="Arial" charset="0"/>
+                        <a:cs typeface="Arial" charset="0"/>
+                      </a:endParaRPr>
+                    </a:p>
+                  </a:txBody>
+                  <a:tcPr marL="91440" marR="91440" marT="45720" marB="45720" anchor="ctr">
+                    <a:lnL w="9525" cap="flat" cmpd="sng" algn="ctr">
+                      <a:solidFill>
+                        <a:srgbClr val="808080"/>
+                      </a:solidFill>
+                      <a:prstDash val="solid"/>
+                      <a:round/>
+                      <a:headEnd type="none" w="med" len="med"/>
+                      <a:tailEnd type="none" w="med" len="med"/>
+                    </a:lnL>
+                    <a:lnR w="9525" cap="flat" cmpd="sng" algn="ctr">
+                      <a:solidFill>
+                        <a:srgbClr val="808080"/>
+                      </a:solidFill>
+                      <a:prstDash val="solid"/>
+                      <a:round/>
+                      <a:headEnd type="none" w="med" len="med"/>
+                      <a:tailEnd type="none" w="med" len="med"/>
+                    </a:lnR>
+                    <a:lnT w="9525" cap="flat" cmpd="sng" algn="ctr">
+                      <a:solidFill>
+                        <a:srgbClr val="808080"/>
+                      </a:solidFill>
+                      <a:prstDash val="solid"/>
+                      <a:round/>
+                      <a:headEnd type="none" w="med" len="med"/>
+                      <a:tailEnd type="none" w="med" len="med"/>
+                    </a:lnT>
+                    <a:lnB w="9525" cap="flat" cmpd="sng" algn="ctr">
+                      <a:solidFill>
+                        <a:srgbClr val="808080"/>
+                      </a:solidFill>
+                      <a:prstDash val="solid"/>
+                      <a:round/>
+                      <a:headEnd type="none" w="med" len="med"/>
+                      <a:tailEnd type="none" w="med" len="med"/>
+                    </a:lnB>
+                    <a:solidFill>
+                      <a:srgbClr val="FFFFFF"/>
+                    </a:solidFill>
+                  </a:tcPr>
+                </a:tc>
+                <a:tc>
+                  <a:txBody>
+                    <a:bodyPr/>
+                    <a:lstStyle/>
+                    <a:p>
+                      <a:pPr algn="ctr" indent="0" marL="0">
+                        <a:buNone/>
+                      </a:pPr>
+                      <a:endParaRPr lang="en-US" sz="1050" dirty="0">
+                        <a:latin typeface="Arial" charset="0"/>
+                        <a:ea typeface="Arial" charset="0"/>
+                        <a:cs typeface="Arial" charset="0"/>
+                      </a:endParaRPr>
+                    </a:p>
+                  </a:txBody>
+                  <a:tcPr marL="91440" marR="91440" marT="45720" marB="45720" anchor="ctr">
+                    <a:lnL w="9525" cap="flat" cmpd="sng" algn="ctr">
+                      <a:solidFill>
+                        <a:srgbClr val="808080"/>
+                      </a:solidFill>
+                      <a:prstDash val="solid"/>
+                      <a:round/>
+                      <a:headEnd type="none" w="med" len="med"/>
+                      <a:tailEnd type="none" w="med" len="med"/>
+                    </a:lnL>
+                    <a:lnR w="9525" cap="flat" cmpd="sng" algn="ctr">
+                      <a:solidFill>
+                        <a:srgbClr val="808080"/>
+                      </a:solidFill>
+                      <a:prstDash val="solid"/>
+                      <a:round/>
+                      <a:headEnd type="none" w="med" len="med"/>
+                      <a:tailEnd type="none" w="med" len="med"/>
+                    </a:lnR>
+                    <a:lnT w="9525" cap="flat" cmpd="sng" algn="ctr">
+                      <a:solidFill>
+                        <a:srgbClr val="808080"/>
+                      </a:solidFill>
+                      <a:prstDash val="solid"/>
+                      <a:round/>
+                      <a:headEnd type="none" w="med" len="med"/>
+                      <a:tailEnd type="none" w="med" len="med"/>
+                    </a:lnT>
+                    <a:lnB w="9525" cap="flat" cmpd="sng" algn="ctr">
+                      <a:solidFill>
+                        <a:srgbClr val="808080"/>
+                      </a:solidFill>
+                      <a:prstDash val="solid"/>
+                      <a:round/>
+                      <a:headEnd type="none" w="med" len="med"/>
+                      <a:tailEnd type="none" w="med" len="med"/>
+                    </a:lnB>
+                    <a:solidFill>
+                      <a:srgbClr val="FFFFFF"/>
+                    </a:solidFill>
+                  </a:tcPr>
+                </a:tc>
+              </a:tr>
+              <a:tr h="310896">
+                <a:tc>
+                  <a:txBody>
+                    <a:bodyPr/>
+                    <a:lstStyle/>
+                    <a:p>
+                      <a:pPr algn="ctr" indent="0" marL="0">
+                        <a:buNone/>
+                      </a:pPr>
+                      <a:r>
+                        <a:rPr lang="en-US" sz="1050" dirty="0">
+                          <a:solidFill>
+                            <a:srgbClr val="000000"/>
+                          </a:solidFill>
+                          <a:latin typeface="Arial" pitchFamily="34" charset="0"/>
+                          <a:ea typeface="Arial" pitchFamily="34" charset="-122"/>
+                          <a:cs typeface="Arial" pitchFamily="34" charset="-120"/>
+                        </a:rPr>
+                        <a:t>Loader</a:t>
+                      </a:r>
+                      <a:endParaRPr lang="en-US" sz="1050" dirty="0">
+                        <a:latin typeface="Arial" charset="0"/>
+                        <a:ea typeface="Arial" charset="0"/>
+                        <a:cs typeface="Arial" charset="0"/>
+                      </a:endParaRPr>
+                    </a:p>
+                  </a:txBody>
+                  <a:tcPr marL="91440" marR="91440" marT="45720" marB="45720" anchor="ctr">
+                    <a:lnL w="9525" cap="flat" cmpd="sng" algn="ctr">
+                      <a:solidFill>
+                        <a:srgbClr val="808080"/>
+                      </a:solidFill>
+                      <a:prstDash val="solid"/>
+                      <a:round/>
+                      <a:headEnd type="none" w="med" len="med"/>
+                      <a:tailEnd type="none" w="med" len="med"/>
+                    </a:lnL>
+                    <a:lnR w="9525" cap="flat" cmpd="sng" algn="ctr">
+                      <a:solidFill>
+                        <a:srgbClr val="808080"/>
+                      </a:solidFill>
+                      <a:prstDash val="solid"/>
+                      <a:round/>
+                      <a:headEnd type="none" w="med" len="med"/>
+                      <a:tailEnd type="none" w="med" len="med"/>
+                    </a:lnR>
+                    <a:lnT w="9525" cap="flat" cmpd="sng" algn="ctr">
+                      <a:solidFill>
+                        <a:srgbClr val="808080"/>
+                      </a:solidFill>
+                      <a:prstDash val="solid"/>
+                      <a:round/>
+                      <a:headEnd type="none" w="med" len="med"/>
+                      <a:tailEnd type="none" w="med" len="med"/>
+                    </a:lnT>
+                    <a:lnB w="9525" cap="flat" cmpd="sng" algn="ctr">
+                      <a:solidFill>
+                        <a:srgbClr val="808080"/>
+                      </a:solidFill>
+                      <a:prstDash val="solid"/>
+                      <a:round/>
+                      <a:headEnd type="none" w="med" len="med"/>
+                      <a:tailEnd type="none" w="med" len="med"/>
+                    </a:lnB>
+                    <a:solidFill>
+                      <a:srgbClr val="FFFFFF"/>
+                    </a:solidFill>
+                  </a:tcPr>
+                </a:tc>
+                <a:tc>
+                  <a:txBody>
+                    <a:bodyPr/>
+                    <a:lstStyle/>
+                    <a:p>
+                      <a:pPr algn="ctr" indent="0" marL="0">
+                        <a:buNone/>
+                      </a:pPr>
+                      <a:r>
+                        <a:rPr lang="en-US" sz="1050" dirty="0">
+                          <a:solidFill>
+                            <a:srgbClr val="000000"/>
+                          </a:solidFill>
+                          <a:latin typeface="Arial" pitchFamily="34" charset="0"/>
+                          <a:ea typeface="Arial" pitchFamily="34" charset="-122"/>
+                          <a:cs typeface="Arial" pitchFamily="34" charset="-120"/>
+                        </a:rPr>
+                        <a:t>AJRLD-150U</a:t>
+                      </a:r>
+                      <a:endParaRPr lang="en-US" sz="1050" dirty="0">
+                        <a:latin typeface="Arial" charset="0"/>
+                        <a:ea typeface="Arial" charset="0"/>
+                        <a:cs typeface="Arial" charset="0"/>
+                      </a:endParaRPr>
+                    </a:p>
+                  </a:txBody>
+                  <a:tcPr marL="91440" marR="91440" marT="45720" marB="45720" anchor="ctr">
+                    <a:lnL w="9525" cap="flat" cmpd="sng" algn="ctr">
+                      <a:solidFill>
+                        <a:srgbClr val="808080"/>
+                      </a:solidFill>
+                      <a:prstDash val="solid"/>
+                      <a:round/>
+                      <a:headEnd type="none" w="med" len="med"/>
+                      <a:tailEnd type="none" w="med" len="med"/>
+                    </a:lnL>
+                    <a:lnR w="9525" cap="flat" cmpd="sng" algn="ctr">
+                      <a:solidFill>
+                        <a:srgbClr val="808080"/>
+                      </a:solidFill>
+                      <a:prstDash val="solid"/>
+                      <a:round/>
+                      <a:headEnd type="none" w="med" len="med"/>
+                      <a:tailEnd type="none" w="med" len="med"/>
+                    </a:lnR>
+                    <a:lnT w="9525" cap="flat" cmpd="sng" algn="ctr">
+                      <a:solidFill>
+                        <a:srgbClr val="808080"/>
+                      </a:solidFill>
+                      <a:prstDash val="solid"/>
+                      <a:round/>
+                      <a:headEnd type="none" w="med" len="med"/>
+                      <a:tailEnd type="none" w="med" len="med"/>
+                    </a:lnT>
+                    <a:lnB w="9525" cap="flat" cmpd="sng" algn="ctr">
+                      <a:solidFill>
+                        <a:srgbClr val="808080"/>
+                      </a:solidFill>
+                      <a:prstDash val="solid"/>
+                      <a:round/>
+                      <a:headEnd type="none" w="med" len="med"/>
+                      <a:tailEnd type="none" w="med" len="med"/>
+                    </a:lnB>
+                    <a:solidFill>
+                      <a:srgbClr val="FFFFFF"/>
+                    </a:solidFill>
+                  </a:tcPr>
+                </a:tc>
+                <a:tc>
+                  <a:txBody>
+                    <a:bodyPr/>
+                    <a:lstStyle/>
+                    <a:p>
+                      <a:pPr algn="ctr" indent="0" marL="0">
+                        <a:buNone/>
+                      </a:pPr>
+                      <a:r>
+                        <a:rPr lang="en-US" sz="1050" dirty="0">
+                          <a:solidFill>
+                            <a:srgbClr val="000000"/>
+                          </a:solidFill>
+                          <a:latin typeface="Arial" pitchFamily="34" charset="0"/>
+                          <a:ea typeface="Arial" pitchFamily="34" charset="-122"/>
+                          <a:cs typeface="Arial" pitchFamily="34" charset="-120"/>
+                        </a:rPr>
+                        <a:t>2</a:t>
+                      </a:r>
+                      <a:endParaRPr lang="en-US" sz="1050" dirty="0">
+                        <a:latin typeface="Arial" charset="0"/>
+                        <a:ea typeface="Arial" charset="0"/>
+                        <a:cs typeface="Arial" charset="0"/>
+                      </a:endParaRPr>
+                    </a:p>
+                  </a:txBody>
+                  <a:tcPr marL="91440" marR="91440" marT="45720" marB="45720" anchor="ctr">
+                    <a:lnL w="9525" cap="flat" cmpd="sng" algn="ctr">
+                      <a:solidFill>
+                        <a:srgbClr val="808080"/>
+                      </a:solidFill>
+                      <a:prstDash val="solid"/>
+                      <a:round/>
+                      <a:headEnd type="none" w="med" len="med"/>
+                      <a:tailEnd type="none" w="med" len="med"/>
+                    </a:lnL>
+                    <a:lnR w="9525" cap="flat" cmpd="sng" algn="ctr">
+                      <a:solidFill>
+                        <a:srgbClr val="808080"/>
+                      </a:solidFill>
+                      <a:prstDash val="solid"/>
+                      <a:round/>
+                      <a:headEnd type="none" w="med" len="med"/>
+                      <a:tailEnd type="none" w="med" len="med"/>
+                    </a:lnR>
+                    <a:lnT w="9525" cap="flat" cmpd="sng" algn="ctr">
+                      <a:solidFill>
+                        <a:srgbClr val="808080"/>
+                      </a:solidFill>
+                      <a:prstDash val="solid"/>
+                      <a:round/>
+                      <a:headEnd type="none" w="med" len="med"/>
+                      <a:tailEnd type="none" w="med" len="med"/>
+                    </a:lnT>
+                    <a:lnB w="9525" cap="flat" cmpd="sng" algn="ctr">
+                      <a:solidFill>
+                        <a:srgbClr val="808080"/>
+                      </a:solidFill>
+                      <a:prstDash val="solid"/>
+                      <a:round/>
+                      <a:headEnd type="none" w="med" len="med"/>
+                      <a:tailEnd type="none" w="med" len="med"/>
+                    </a:lnB>
+                    <a:solidFill>
+                      <a:srgbClr val="FFFFFF"/>
+                    </a:solidFill>
+                  </a:tcPr>
+                </a:tc>
+                <a:tc>
+                  <a:txBody>
+                    <a:bodyPr/>
+                    <a:lstStyle/>
+                    <a:p>
+                      <a:pPr algn="ctr" indent="0" marL="0">
+                        <a:buNone/>
+                      </a:pPr>
+                      <a:r>
+                        <a:rPr lang="en-US" sz="1050" dirty="0">
+                          <a:solidFill>
+                            <a:srgbClr val="000000"/>
+                          </a:solidFill>
+                          <a:latin typeface="Arial" pitchFamily="34" charset="0"/>
+                          <a:ea typeface="Arial" pitchFamily="34" charset="-122"/>
+                          <a:cs typeface="Arial" pitchFamily="34" charset="-120"/>
+                        </a:rPr>
+                        <a:t>전단 컨베이어</a:t>
+                      </a:r>
+                      <a:endParaRPr lang="en-US" sz="1050" dirty="0">
+                        <a:latin typeface="Arial" charset="0"/>
+                        <a:ea typeface="Arial" charset="0"/>
+                        <a:cs typeface="Arial" charset="0"/>
+                      </a:endParaRPr>
+                    </a:p>
+                  </a:txBody>
+                  <a:tcPr marL="91440" marR="91440" marT="45720" marB="45720" anchor="ctr">
+                    <a:lnL w="9525" cap="flat" cmpd="sng" algn="ctr">
+                      <a:solidFill>
+                        <a:srgbClr val="808080"/>
+                      </a:solidFill>
+                      <a:prstDash val="solid"/>
+                      <a:round/>
+                      <a:headEnd type="none" w="med" len="med"/>
+                      <a:tailEnd type="none" w="med" len="med"/>
+                    </a:lnL>
+                    <a:lnR w="9525" cap="flat" cmpd="sng" algn="ctr">
+                      <a:solidFill>
+                        <a:srgbClr val="808080"/>
+                      </a:solidFill>
+                      <a:prstDash val="solid"/>
+                      <a:round/>
+                      <a:headEnd type="none" w="med" len="med"/>
+                      <a:tailEnd type="none" w="med" len="med"/>
+                    </a:lnR>
+                    <a:lnT w="9525" cap="flat" cmpd="sng" algn="ctr">
+                      <a:solidFill>
+                        <a:srgbClr val="808080"/>
+                      </a:solidFill>
+                      <a:prstDash val="solid"/>
+                      <a:round/>
+                      <a:headEnd type="none" w="med" len="med"/>
+                      <a:tailEnd type="none" w="med" len="med"/>
+                    </a:lnT>
+                    <a:lnB w="9525" cap="flat" cmpd="sng" algn="ctr">
+                      <a:solidFill>
+                        <a:srgbClr val="808080"/>
+                      </a:solidFill>
+                      <a:prstDash val="solid"/>
+                      <a:round/>
+                      <a:headEnd type="none" w="med" len="med"/>
+                      <a:tailEnd type="none" w="med" len="med"/>
+                    </a:lnB>
+                    <a:solidFill>
+                      <a:srgbClr val="FFFFFF"/>
+                    </a:solidFill>
+                  </a:tcPr>
+                </a:tc>
+              </a:tr>
+              <a:tr h="310896">
+                <a:tc>
+                  <a:txBody>
+                    <a:bodyPr/>
+                    <a:lstStyle/>
+                    <a:p>
+                      <a:pPr algn="ctr" indent="0" marL="0">
+                        <a:buNone/>
+                      </a:pPr>
+                      <a:r>
+                        <a:rPr lang="en-US" sz="1050" dirty="0">
+                          <a:solidFill>
+                            <a:srgbClr val="000000"/>
+                          </a:solidFill>
+                          <a:latin typeface="Arial" pitchFamily="34" charset="0"/>
+                          <a:ea typeface="Arial" pitchFamily="34" charset="-122"/>
+                          <a:cs typeface="Arial" pitchFamily="34" charset="-120"/>
+                        </a:rPr>
+                        <a:t>UnLoader</a:t>
+                      </a:r>
+                      <a:endParaRPr lang="en-US" sz="1050" dirty="0">
+                        <a:latin typeface="Arial" charset="0"/>
+                        <a:ea typeface="Arial" charset="0"/>
+                        <a:cs typeface="Arial" charset="0"/>
+                      </a:endParaRPr>
+                    </a:p>
+                  </a:txBody>
+                  <a:tcPr marL="91440" marR="91440" marT="45720" marB="45720" anchor="ctr">
+                    <a:lnL w="9525" cap="flat" cmpd="sng" algn="ctr">
+                      <a:solidFill>
+                        <a:srgbClr val="808080"/>
+                      </a:solidFill>
+                      <a:prstDash val="solid"/>
+                      <a:round/>
+                      <a:headEnd type="none" w="med" len="med"/>
+                      <a:tailEnd type="none" w="med" len="med"/>
+                    </a:lnL>
+                    <a:lnR w="9525" cap="flat" cmpd="sng" algn="ctr">
+                      <a:solidFill>
+                        <a:srgbClr val="808080"/>
+                      </a:solidFill>
+                      <a:prstDash val="solid"/>
+                      <a:round/>
+                      <a:headEnd type="none" w="med" len="med"/>
+                      <a:tailEnd type="none" w="med" len="med"/>
+                    </a:lnR>
+                    <a:lnT w="9525" cap="flat" cmpd="sng" algn="ctr">
+                      <a:solidFill>
+                        <a:srgbClr val="808080"/>
+                      </a:solidFill>
+                      <a:prstDash val="solid"/>
+                      <a:round/>
+                      <a:headEnd type="none" w="med" len="med"/>
+                      <a:tailEnd type="none" w="med" len="med"/>
+                    </a:lnT>
+                    <a:lnB w="9525" cap="flat" cmpd="sng" algn="ctr">
+                      <a:solidFill>
+                        <a:srgbClr val="808080"/>
+                      </a:solidFill>
+                      <a:prstDash val="solid"/>
+                      <a:round/>
+                      <a:headEnd type="none" w="med" len="med"/>
+                      <a:tailEnd type="none" w="med" len="med"/>
+                    </a:lnB>
+                    <a:solidFill>
+                      <a:srgbClr val="FFFFFF"/>
+                    </a:solidFill>
+                  </a:tcPr>
+                </a:tc>
+                <a:tc>
+                  <a:txBody>
+                    <a:bodyPr/>
+                    <a:lstStyle/>
+                    <a:p>
+                      <a:pPr algn="ctr" indent="0" marL="0">
+                        <a:buNone/>
+                      </a:pPr>
+                      <a:r>
+                        <a:rPr lang="en-US" sz="1050" dirty="0">
+                          <a:solidFill>
+                            <a:srgbClr val="000000"/>
+                          </a:solidFill>
+                          <a:latin typeface="Arial" pitchFamily="34" charset="0"/>
+                          <a:ea typeface="Arial" pitchFamily="34" charset="-122"/>
+                          <a:cs typeface="Arial" pitchFamily="34" charset="-120"/>
+                        </a:rPr>
+                        <a:t>AWT-150U</a:t>
+                      </a:r>
+                      <a:endParaRPr lang="en-US" sz="1050" dirty="0">
+                        <a:latin typeface="Arial" charset="0"/>
+                        <a:ea typeface="Arial" charset="0"/>
+                        <a:cs typeface="Arial" charset="0"/>
+                      </a:endParaRPr>
+                    </a:p>
+                  </a:txBody>
+                  <a:tcPr marL="91440" marR="91440" marT="45720" marB="45720" anchor="ctr">
+                    <a:lnL w="9525" cap="flat" cmpd="sng" algn="ctr">
+                      <a:solidFill>
+                        <a:srgbClr val="808080"/>
+                      </a:solidFill>
+                      <a:prstDash val="solid"/>
+                      <a:round/>
+                      <a:headEnd type="none" w="med" len="med"/>
+                      <a:tailEnd type="none" w="med" len="med"/>
+                    </a:lnL>
+                    <a:lnR w="9525" cap="flat" cmpd="sng" algn="ctr">
+                      <a:solidFill>
+                        <a:srgbClr val="808080"/>
+                      </a:solidFill>
+                      <a:prstDash val="solid"/>
+                      <a:round/>
+                      <a:headEnd type="none" w="med" len="med"/>
+                      <a:tailEnd type="none" w="med" len="med"/>
+                    </a:lnR>
+                    <a:lnT w="9525" cap="flat" cmpd="sng" algn="ctr">
+                      <a:solidFill>
+                        <a:srgbClr val="808080"/>
+                      </a:solidFill>
+                      <a:prstDash val="solid"/>
+                      <a:round/>
+                      <a:headEnd type="none" w="med" len="med"/>
+                      <a:tailEnd type="none" w="med" len="med"/>
+                    </a:lnT>
+                    <a:lnB w="9525" cap="flat" cmpd="sng" algn="ctr">
+                      <a:solidFill>
+                        <a:srgbClr val="808080"/>
+                      </a:solidFill>
+                      <a:prstDash val="solid"/>
+                      <a:round/>
+                      <a:headEnd type="none" w="med" len="med"/>
+                      <a:tailEnd type="none" w="med" len="med"/>
+                    </a:lnB>
+                    <a:solidFill>
+                      <a:srgbClr val="FFFFFF"/>
+                    </a:solidFill>
+                  </a:tcPr>
+                </a:tc>
+                <a:tc>
+                  <a:txBody>
+                    <a:bodyPr/>
+                    <a:lstStyle/>
+                    <a:p>
+                      <a:pPr algn="ctr" indent="0" marL="0">
+                        <a:buNone/>
+                      </a:pPr>
+                      <a:r>
+                        <a:rPr lang="en-US" sz="1050" dirty="0">
+                          <a:solidFill>
+                            <a:srgbClr val="000000"/>
+                          </a:solidFill>
+                          <a:latin typeface="Arial" pitchFamily="34" charset="0"/>
+                          <a:ea typeface="Arial" pitchFamily="34" charset="-122"/>
+                          <a:cs typeface="Arial" pitchFamily="34" charset="-120"/>
+                        </a:rPr>
+                        <a:t>2</a:t>
+                      </a:r>
+                      <a:endParaRPr lang="en-US" sz="1050" dirty="0">
+                        <a:latin typeface="Arial" charset="0"/>
+                        <a:ea typeface="Arial" charset="0"/>
+                        <a:cs typeface="Arial" charset="0"/>
+                      </a:endParaRPr>
+                    </a:p>
+                  </a:txBody>
+                  <a:tcPr marL="91440" marR="91440" marT="45720" marB="45720" anchor="ctr">
+                    <a:lnL w="9525" cap="flat" cmpd="sng" algn="ctr">
+                      <a:solidFill>
+                        <a:srgbClr val="808080"/>
+                      </a:solidFill>
+                      <a:prstDash val="solid"/>
+                      <a:round/>
+                      <a:headEnd type="none" w="med" len="med"/>
+                      <a:tailEnd type="none" w="med" len="med"/>
+                    </a:lnL>
+                    <a:lnR w="9525" cap="flat" cmpd="sng" algn="ctr">
+                      <a:solidFill>
+                        <a:srgbClr val="808080"/>
+                      </a:solidFill>
+                      <a:prstDash val="solid"/>
+                      <a:round/>
+                      <a:headEnd type="none" w="med" len="med"/>
+                      <a:tailEnd type="none" w="med" len="med"/>
+                    </a:lnR>
+                    <a:lnT w="9525" cap="flat" cmpd="sng" algn="ctr">
+                      <a:solidFill>
+                        <a:srgbClr val="808080"/>
+                      </a:solidFill>
+                      <a:prstDash val="solid"/>
+                      <a:round/>
+                      <a:headEnd type="none" w="med" len="med"/>
+                      <a:tailEnd type="none" w="med" len="med"/>
+                    </a:lnT>
+                    <a:lnB w="9525" cap="flat" cmpd="sng" algn="ctr">
+                      <a:solidFill>
+                        <a:srgbClr val="808080"/>
+                      </a:solidFill>
+                      <a:prstDash val="solid"/>
+                      <a:round/>
+                      <a:headEnd type="none" w="med" len="med"/>
+                      <a:tailEnd type="none" w="med" len="med"/>
+                    </a:lnB>
+                    <a:solidFill>
+                      <a:srgbClr val="FFFFFF"/>
+                    </a:solidFill>
+                  </a:tcPr>
+                </a:tc>
+                <a:tc>
+                  <a:txBody>
+                    <a:bodyPr/>
+                    <a:lstStyle/>
+                    <a:p>
+                      <a:pPr algn="ctr" indent="0" marL="0">
+                        <a:buNone/>
+                      </a:pPr>
+                      <a:r>
+                        <a:rPr lang="en-US" sz="1050" dirty="0">
+                          <a:solidFill>
+                            <a:srgbClr val="000000"/>
+                          </a:solidFill>
+                          <a:latin typeface="Arial" pitchFamily="34" charset="0"/>
+                          <a:ea typeface="Arial" pitchFamily="34" charset="-122"/>
+                          <a:cs typeface="Arial" pitchFamily="34" charset="-120"/>
+                        </a:rPr>
+                        <a:t>후단 컨베이어</a:t>
+                      </a:r>
+                      <a:endParaRPr lang="en-US" sz="1050" dirty="0">
+                        <a:latin typeface="Arial" charset="0"/>
+                        <a:ea typeface="Arial" charset="0"/>
+                        <a:cs typeface="Arial" charset="0"/>
+                      </a:endParaRPr>
+                    </a:p>
+                  </a:txBody>
+                  <a:tcPr marL="91440" marR="91440" marT="45720" marB="45720" anchor="ctr">
+                    <a:lnL w="9525" cap="flat" cmpd="sng" algn="ctr">
+                      <a:solidFill>
+                        <a:srgbClr val="808080"/>
+                      </a:solidFill>
+                      <a:prstDash val="solid"/>
+                      <a:round/>
+                      <a:headEnd type="none" w="med" len="med"/>
+                      <a:tailEnd type="none" w="med" len="med"/>
+                    </a:lnL>
+                    <a:lnR w="9525" cap="flat" cmpd="sng" algn="ctr">
+                      <a:solidFill>
+                        <a:srgbClr val="808080"/>
+                      </a:solidFill>
+                      <a:prstDash val="solid"/>
+                      <a:round/>
+                      <a:headEnd type="none" w="med" len="med"/>
+                      <a:tailEnd type="none" w="med" len="med"/>
+                    </a:lnR>
+                    <a:lnT w="9525" cap="flat" cmpd="sng" algn="ctr">
+                      <a:solidFill>
+                        <a:srgbClr val="808080"/>
+                      </a:solidFill>
+                      <a:prstDash val="solid"/>
+                      <a:round/>
+                      <a:headEnd type="none" w="med" len="med"/>
+                      <a:tailEnd type="none" w="med" len="med"/>
+                    </a:lnT>
+                    <a:lnB w="9525" cap="flat" cmpd="sng" algn="ctr">
+                      <a:solidFill>
+                        <a:srgbClr val="808080"/>
+                      </a:solidFill>
+                      <a:prstDash val="solid"/>
+                      <a:round/>
+                      <a:headEnd type="none" w="med" len="med"/>
+                      <a:tailEnd type="none" w="med" len="med"/>
+                    </a:lnB>
+                    <a:solidFill>
+                      <a:srgbClr val="FFFFFF"/>
+                    </a:solidFill>
+                  </a:tcPr>
+                </a:tc>
+              </a:tr>
+              <a:tr h="310896">
+                <a:tc>
+                  <a:txBody>
+                    <a:bodyPr/>
+                    <a:lstStyle/>
+                    <a:p>
+                      <a:pPr algn="ctr" indent="0" marL="0">
+                        <a:buNone/>
+                      </a:pPr>
+                      <a:r>
+                        <a:rPr lang="en-US" sz="1050" dirty="0">
+                          <a:solidFill>
+                            <a:srgbClr val="000000"/>
+                          </a:solidFill>
+                          <a:latin typeface="Arial" pitchFamily="34" charset="0"/>
+                          <a:ea typeface="Arial" pitchFamily="34" charset="-122"/>
+                          <a:cs typeface="Arial" pitchFamily="34" charset="-120"/>
+                        </a:rPr>
+                        <a:t>합계</a:t>
+                      </a:r>
+                      <a:endParaRPr lang="en-US" sz="1050" dirty="0">
+                        <a:latin typeface="Arial" charset="0"/>
+                        <a:ea typeface="Arial" charset="0"/>
+                        <a:cs typeface="Arial" charset="0"/>
+                      </a:endParaRPr>
+                    </a:p>
+                  </a:txBody>
+                  <a:tcPr marL="91440" marR="91440" marT="45720" marB="45720" anchor="ctr">
+                    <a:lnL w="9525" cap="flat" cmpd="sng" algn="ctr">
+                      <a:solidFill>
+                        <a:srgbClr val="808080"/>
+                      </a:solidFill>
+                      <a:prstDash val="solid"/>
+                      <a:round/>
+                      <a:headEnd type="none" w="med" len="med"/>
+                      <a:tailEnd type="none" w="med" len="med"/>
+                    </a:lnL>
+                    <a:lnR w="9525" cap="flat" cmpd="sng" algn="ctr">
+                      <a:solidFill>
+                        <a:srgbClr val="808080"/>
+                      </a:solidFill>
+                      <a:prstDash val="solid"/>
+                      <a:round/>
+                      <a:headEnd type="none" w="med" len="med"/>
+                      <a:tailEnd type="none" w="med" len="med"/>
+                    </a:lnR>
+                    <a:lnT w="9525" cap="flat" cmpd="sng" algn="ctr">
+                      <a:solidFill>
+                        <a:srgbClr val="808080"/>
+                      </a:solidFill>
+                      <a:prstDash val="solid"/>
+                      <a:round/>
+                      <a:headEnd type="none" w="med" len="med"/>
+                      <a:tailEnd type="none" w="med" len="med"/>
+                    </a:lnT>
+                    <a:lnB w="9525" cap="flat" cmpd="sng" algn="ctr">
+                      <a:solidFill>
+                        <a:srgbClr val="808080"/>
+                      </a:solidFill>
+                      <a:prstDash val="solid"/>
+                      <a:round/>
+                      <a:headEnd type="none" w="med" len="med"/>
+                      <a:tailEnd type="none" w="med" len="med"/>
+                    </a:lnB>
+                    <a:solidFill>
+                      <a:srgbClr val="FFFFFF"/>
+                    </a:solidFill>
+                  </a:tcPr>
+                </a:tc>
+                <a:tc>
+                  <a:txBody>
+                    <a:bodyPr/>
+                    <a:lstStyle/>
+                    <a:p>
+                      <a:pPr algn="ctr" indent="0" marL="0">
+                        <a:buNone/>
+                      </a:pPr>
+                      <a:endParaRPr lang="en-US" sz="1050" dirty="0">
+                        <a:latin typeface="Arial" charset="0"/>
+                        <a:ea typeface="Arial" charset="0"/>
+                        <a:cs typeface="Arial" charset="0"/>
+                      </a:endParaRPr>
+                    </a:p>
+                  </a:txBody>
+                  <a:tcPr marL="91440" marR="91440" marT="45720" marB="45720" anchor="ctr">
+                    <a:lnL w="9525" cap="flat" cmpd="sng" algn="ctr">
+                      <a:solidFill>
+                        <a:srgbClr val="808080"/>
+                      </a:solidFill>
+                      <a:prstDash val="solid"/>
+                      <a:round/>
+                      <a:headEnd type="none" w="med" len="med"/>
+                      <a:tailEnd type="none" w="med" len="med"/>
+                    </a:lnL>
+                    <a:lnR w="9525" cap="flat" cmpd="sng" algn="ctr">
+                      <a:solidFill>
+                        <a:srgbClr val="808080"/>
+                      </a:solidFill>
+                      <a:prstDash val="solid"/>
+                      <a:round/>
+                      <a:headEnd type="none" w="med" len="med"/>
+                      <a:tailEnd type="none" w="med" len="med"/>
+                    </a:lnR>
+                    <a:lnT w="9525" cap="flat" cmpd="sng" algn="ctr">
+                      <a:solidFill>
+                        <a:srgbClr val="808080"/>
+                      </a:solidFill>
+                      <a:prstDash val="solid"/>
+                      <a:round/>
+                      <a:headEnd type="none" w="med" len="med"/>
+                      <a:tailEnd type="none" w="med" len="med"/>
+                    </a:lnT>
+                    <a:lnB w="9525" cap="flat" cmpd="sng" algn="ctr">
+                      <a:solidFill>
+                        <a:srgbClr val="808080"/>
+                      </a:solidFill>
+                      <a:prstDash val="solid"/>
+                      <a:round/>
+                      <a:headEnd type="none" w="med" len="med"/>
+                      <a:tailEnd type="none" w="med" len="med"/>
+                    </a:lnB>
+                    <a:solidFill>
+                      <a:srgbClr val="FFFFFF"/>
+                    </a:solidFill>
+                  </a:tcPr>
+                </a:tc>
+                <a:tc>
+                  <a:txBody>
+                    <a:bodyPr/>
+                    <a:lstStyle/>
+                    <a:p>
+                      <a:pPr algn="ctr" indent="0" marL="0">
+                        <a:buNone/>
+                      </a:pPr>
+                      <a:r>
+                        <a:rPr lang="en-US" sz="1050" dirty="0">
+                          <a:solidFill>
+                            <a:srgbClr val="000000"/>
+                          </a:solidFill>
+                          <a:latin typeface="Arial" pitchFamily="34" charset="0"/>
+                          <a:ea typeface="Arial" pitchFamily="34" charset="-122"/>
+                          <a:cs typeface="Arial" pitchFamily="34" charset="-120"/>
+                        </a:rPr>
+                        <a:t>8</a:t>
+                      </a:r>
+                      <a:endParaRPr lang="en-US" sz="1050" dirty="0">
+                        <a:latin typeface="Arial" charset="0"/>
+                        <a:ea typeface="Arial" charset="0"/>
+                        <a:cs typeface="Arial" charset="0"/>
+                      </a:endParaRPr>
+                    </a:p>
+                  </a:txBody>
+                  <a:tcPr marL="91440" marR="91440" marT="45720" marB="45720" anchor="ctr">
+                    <a:lnL w="9525" cap="flat" cmpd="sng" algn="ctr">
+                      <a:solidFill>
+                        <a:srgbClr val="808080"/>
+                      </a:solidFill>
+                      <a:prstDash val="solid"/>
+                      <a:round/>
+                      <a:headEnd type="none" w="med" len="med"/>
+                      <a:tailEnd type="none" w="med" len="med"/>
+                    </a:lnL>
+                    <a:lnR w="9525" cap="flat" cmpd="sng" algn="ctr">
+                      <a:solidFill>
+                        <a:srgbClr val="808080"/>
+                      </a:solidFill>
+                      <a:prstDash val="solid"/>
+                      <a:round/>
+                      <a:headEnd type="none" w="med" len="med"/>
+                      <a:tailEnd type="none" w="med" len="med"/>
+                    </a:lnR>
+                    <a:lnT w="9525" cap="flat" cmpd="sng" algn="ctr">
+                      <a:solidFill>
+                        <a:srgbClr val="808080"/>
+                      </a:solidFill>
+                      <a:prstDash val="solid"/>
+                      <a:round/>
+                      <a:headEnd type="none" w="med" len="med"/>
+                      <a:tailEnd type="none" w="med" len="med"/>
+                    </a:lnT>
+                    <a:lnB w="9525" cap="flat" cmpd="sng" algn="ctr">
+                      <a:solidFill>
+                        <a:srgbClr val="808080"/>
+                      </a:solidFill>
+                      <a:prstDash val="solid"/>
+                      <a:round/>
+                      <a:headEnd type="none" w="med" len="med"/>
+                      <a:tailEnd type="none" w="med" len="med"/>
+                    </a:lnB>
+                    <a:solidFill>
+                      <a:srgbClr val="FFFFFF"/>
+                    </a:solidFill>
+                  </a:tcPr>
+                </a:tc>
+                <a:tc>
+                  <a:txBody>
+                    <a:bodyPr/>
+                    <a:lstStyle/>
+                    <a:p>
+                      <a:pPr algn="ctr" indent="0" marL="0">
+                        <a:buNone/>
+                      </a:pPr>
+                      <a:endParaRPr lang="en-US" sz="1050" dirty="0">
+                        <a:latin typeface="Arial" charset="0"/>
+                        <a:ea typeface="Arial" charset="0"/>
+                        <a:cs typeface="Arial" charset="0"/>
+                      </a:endParaRPr>
+                    </a:p>
+                  </a:txBody>
+                  <a:tcPr marL="91440" marR="91440" marT="45720" marB="45720" anchor="ctr">
+                    <a:lnL w="9525" cap="flat" cmpd="sng" algn="ctr">
+                      <a:solidFill>
+                        <a:srgbClr val="808080"/>
+                      </a:solidFill>
+                      <a:prstDash val="solid"/>
+                      <a:round/>
+                      <a:headEnd type="none" w="med" len="med"/>
+                      <a:tailEnd type="none" w="med" len="med"/>
+                    </a:lnL>
+                    <a:lnR w="9525" cap="flat" cmpd="sng" algn="ctr">
+                      <a:solidFill>
+                        <a:srgbClr val="808080"/>
+                      </a:solidFill>
+                      <a:prstDash val="solid"/>
+                      <a:round/>
+                      <a:headEnd type="none" w="med" len="med"/>
+                      <a:tailEnd type="none" w="med" len="med"/>
+                    </a:lnR>
+                    <a:lnT w="9525" cap="flat" cmpd="sng" algn="ctr">
+                      <a:solidFill>
+                        <a:srgbClr val="808080"/>
+                      </a:solidFill>
+                      <a:prstDash val="solid"/>
+                      <a:round/>
+                      <a:headEnd type="none" w="med" len="med"/>
+                      <a:tailEnd type="none" w="med" len="med"/>
+                    </a:lnT>
+                    <a:lnB w="9525" cap="flat" cmpd="sng" algn="ctr">
+                      <a:solidFill>
+                        <a:srgbClr val="808080"/>
+                      </a:solidFill>
+                      <a:prstDash val="solid"/>
+                      <a:round/>
+                      <a:headEnd type="none" w="med" len="med"/>
+                      <a:tailEnd type="none" w="med" len="med"/>
+                    </a:lnB>
+                    <a:solidFill>
+                      <a:srgbClr val="FFFFFF"/>
+                    </a:solidFill>
+                  </a:tcPr>
+                </a:tc>
+              </a:tr>
+            </a:tbl>
+          </a:graphicData>
+        </a:graphic>
+      </p:graphicFrame>
+      <p:sp>
+        <p:nvSpPr>
+          <p:cNvPr id="25" name="Shape 22"/>
+          <p:cNvSpPr/>
+          <p:nvPr/>
+        </p:nvSpPr>
+        <p:spPr>
+          <a:xfrm>
+            <a:off x="228600" y="6473952"/>
+            <a:ext cx="8686800" cy="0"/>
+          </a:xfrm>
+          <a:prstGeom prst="line">
+            <a:avLst/>
+          </a:prstGeom>
+          <a:noFill/>
+          <a:ln w="19050">
+            <a:solidFill>
+              <a:srgbClr val="00A651"/>
+            </a:solidFill>
+            <a:prstDash val="solid"/>
+          </a:ln>
+        </p:spPr>
+      </p:sp>
+      <p:sp>
+        <p:nvSpPr>
+          <p:cNvPr id="26" name="Text 23"/>
+          <p:cNvSpPr/>
+          <p:nvPr/>
+        </p:nvSpPr>
+        <p:spPr>
+          <a:xfrm>
+            <a:off x="228600" y="6510528"/>
+            <a:ext cx="4206240" cy="228600"/>
+          </a:xfrm>
+          <a:prstGeom prst="rect">
+            <a:avLst/>
+          </a:prstGeom>
+          <a:noFill/>
+          <a:ln/>
+        </p:spPr>
+        <p:txBody>
+          <a:bodyPr wrap="square" lIns="0" tIns="0" rIns="0" bIns="0" rtlCol="0" anchor="ctr"/>
+          <a:lstStyle/>
+          <a:p>
+            <a:pPr algn="l" indent="0" marL="0">
+              <a:buNone/>
+            </a:pPr>
+            <a:r>
+              <a:rPr lang="en-US" sz="750" i="1" dirty="0">
+                <a:solidFill>
+                  <a:srgbClr val="00A651"/>
+                </a:solidFill>
+                <a:latin typeface="Arial" pitchFamily="34" charset="0"/>
+                <a:ea typeface="Arial" pitchFamily="34" charset="-122"/>
+                <a:cs typeface="Arial" pitchFamily="34" charset="-120"/>
+              </a:rPr>
+              <a:t>Creative Solution Company with Advanced Technology</a:t>
+            </a:r>
+            <a:endParaRPr lang="en-US" sz="750" dirty="0"/>
+          </a:p>
+        </p:txBody>
+      </p:sp>
+      <p:sp>
+        <p:nvSpPr>
+          <p:cNvPr id="27" name="Text 24"/>
+          <p:cNvSpPr/>
+          <p:nvPr/>
+        </p:nvSpPr>
+        <p:spPr>
+          <a:xfrm>
+            <a:off x="4206240" y="6510528"/>
+            <a:ext cx="731520" cy="228600"/>
+          </a:xfrm>
+          <a:prstGeom prst="rect">
+            <a:avLst/>
+          </a:prstGeom>
+          <a:noFill/>
+          <a:ln/>
+        </p:spPr>
+        <p:txBody>
+          <a:bodyPr wrap="square" lIns="0" tIns="0" rIns="0" bIns="0" rtlCol="0" anchor="ctr"/>
+          <a:lstStyle/>
+          <a:p>
+            <a:pPr algn="ctr" indent="0" marL="0">
+              <a:buNone/>
+            </a:pPr>
+            <a:r>
+              <a:rPr lang="en-US" sz="900" dirty="0">
+                <a:solidFill>
+                  <a:srgbClr val="404040"/>
+                </a:solidFill>
+                <a:latin typeface="Arial" pitchFamily="34" charset="0"/>
+                <a:ea typeface="Arial" pitchFamily="34" charset="-122"/>
+                <a:cs typeface="Arial" pitchFamily="34" charset="-120"/>
+              </a:rPr>
+              <a:t>1</a:t>
+            </a:r>
+            <a:endParaRPr lang="en-US" sz="900" dirty="0"/>
+          </a:p>
+        </p:txBody>
+      </p:sp>
+      <p:sp>
+        <p:nvSpPr>
+          <p:cNvPr id="28" name="Shape 25"/>
+          <p:cNvSpPr/>
+          <p:nvPr/>
+        </p:nvSpPr>
+        <p:spPr>
+          <a:xfrm>
+            <a:off x="7818120" y="6492240"/>
+            <a:ext cx="1051560" cy="237744"/>
+          </a:xfrm>
+          <a:prstGeom prst="rect">
+            <a:avLst/>
+          </a:prstGeom>
+          <a:solidFill>
+            <a:srgbClr val="FFFFFF"/>
+          </a:solidFill>
+          <a:ln w="12700">
+            <a:solidFill>
+              <a:srgbClr val="C00000"/>
+            </a:solidFill>
+            <a:prstDash val="solid"/>
+          </a:ln>
+        </p:spPr>
+      </p:sp>
+      <p:sp>
+        <p:nvSpPr>
+          <p:cNvPr id="29" name="Text 26"/>
+          <p:cNvSpPr/>
+          <p:nvPr/>
+        </p:nvSpPr>
+        <p:spPr>
+          <a:xfrm>
+            <a:off x="7818120" y="6492240"/>
+            <a:ext cx="1051560" cy="237744"/>
+          </a:xfrm>
+          <a:prstGeom prst="rect">
+            <a:avLst/>
+          </a:prstGeom>
+          <a:noFill/>
+          <a:ln/>
+        </p:spPr>
+        <p:txBody>
+          <a:bodyPr wrap="square" lIns="0" tIns="0" rIns="0" bIns="0" rtlCol="0" anchor="ctr"/>
+          <a:lstStyle/>
+          <a:p>
+            <a:pPr algn="ctr" indent="0" marL="0">
+              <a:buNone/>
+            </a:pPr>
+            <a:r>
+              <a:rPr lang="en-US" sz="800" b="1" dirty="0">
+                <a:solidFill>
+                  <a:srgbClr val="C00000"/>
+                </a:solidFill>
+                <a:latin typeface="Arial" pitchFamily="34" charset="0"/>
+                <a:ea typeface="Arial" pitchFamily="34" charset="-122"/>
+                <a:cs typeface="Arial" pitchFamily="34" charset="-120"/>
+              </a:rPr>
+              <a:t>Confidential</a:t>
+            </a:r>
+            <a:endParaRPr lang="en-US" sz="800" dirty="0"/>
+          </a:p>
+        </p:txBody>
+      </p:sp>
+    </p:spTree>
+  </p:cSld>
+  <p:clrMapOvr>
+    <a:masterClrMapping/>
+  </p:clrMapOvr>
+</p:sld>
+</file>
+
+<file path=ppt/slides/slide2.xml><?xml version="1.0" encoding="utf-8"?>
+<p:sld xmlns:a="http://schemas.openxmlformats.org/drawingml/2006/main" xmlns:r="http://schemas.openxmlformats.org/officeDocument/2006/relationships" xmlns:p="http://schemas.openxmlformats.org/presentationml/2006/main">
+  <p:cSld name="Slide 2">
+    <p:spTree>
+      <p:nvGrpSpPr>
+        <p:cNvPr id="1" name=""/>
+        <p:cNvGrpSpPr/>
+        <p:nvPr/>
+      </p:nvGrpSpPr>
+      <p:grpSpPr>
+        <a:xfrm>
+          <a:off x="0" y="0"/>
+          <a:ext cx="0" cy="0"/>
+          <a:chOff x="0" y="0"/>
+          <a:chExt cx="0" cy="0"/>
+        </a:xfrm>
+      </p:grpSpPr>
+      <p:sp>
+        <p:nvSpPr>
+          <p:cNvPr id="2" name="Text 0"/>
+          <p:cNvSpPr/>
+          <p:nvPr/>
+        </p:nvSpPr>
+        <p:spPr>
+          <a:xfrm>
+            <a:off x="320040" y="201168"/>
+            <a:ext cx="6400800" cy="457200"/>
+          </a:xfrm>
+          <a:prstGeom prst="rect">
+            <a:avLst/>
+          </a:prstGeom>
+          <a:noFill/>
+          <a:ln/>
+        </p:spPr>
+        <p:txBody>
+          <a:bodyPr wrap="square" lIns="0" tIns="0" rIns="0" bIns="0" rtlCol="0" anchor="ctr"/>
+          <a:lstStyle/>
+          <a:p>
+            <a:pPr algn="l" indent="0" marL="0">
+              <a:buNone/>
+            </a:pPr>
+            <a:r>
+              <a:rPr lang="en-US" sz="1400" b="1" dirty="0">
+                <a:solidFill>
+                  <a:srgbClr val="000000"/>
+                </a:solidFill>
+                <a:latin typeface="Arial" pitchFamily="34" charset="0"/>
+                <a:ea typeface="Arial" pitchFamily="34" charset="-122"/>
+                <a:cs typeface="Arial" pitchFamily="34" charset="-120"/>
+              </a:rPr>
+              <a:t>■ </a:t>
+            </a:r>
+            <a:pPr algn="l" indent="0" marL="0">
+              <a:buNone/>
+            </a:pPr>
+            <a:r>
+              <a:rPr lang="en-US" sz="1800" b="1" dirty="0">
+                <a:solidFill>
+                  <a:srgbClr val="000000"/>
+                </a:solidFill>
+                <a:latin typeface="Arial" pitchFamily="34" charset="0"/>
+                <a:ea typeface="Arial" pitchFamily="34" charset="-122"/>
+                <a:cs typeface="Arial" pitchFamily="34" charset="-120"/>
+              </a:rPr>
+              <a:t>SX3K 코팅 Section 자료</a:t>
+            </a:r>
+            <a:endParaRPr lang="en-US" sz="1400" dirty="0"/>
+          </a:p>
+        </p:txBody>
+      </p:sp>
+      <p:sp>
+        <p:nvSpPr>
+          <p:cNvPr id="3" name="Text 1"/>
+          <p:cNvSpPr/>
+          <p:nvPr/>
+        </p:nvSpPr>
+        <p:spPr>
+          <a:xfrm>
+            <a:off x="7406640" y="164592"/>
+            <a:ext cx="1709928" cy="481889"/>
+          </a:xfrm>
+          <a:prstGeom prst="rect">
+            <a:avLst/>
+          </a:prstGeom>
+          <a:noFill/>
+          <a:ln/>
+        </p:spPr>
+        <p:txBody>
+          <a:bodyPr wrap="square" lIns="0" tIns="0" rIns="0" bIns="0" rtlCol="0" anchor="ctr"/>
+          <a:lstStyle/>
+          <a:p>
+            <a:pPr indent="0" marL="0">
+              <a:lnSpc>
+                <a:spcPct val="90000"/>
+              </a:lnSpc>
+              <a:buNone/>
+            </a:pPr>
+            <a:r>
+              <a:rPr lang="en-US" sz="595" i="1" dirty="0">
+                <a:solidFill>
+                  <a:srgbClr val="1F4E79"/>
+                </a:solidFill>
+                <a:latin typeface="Arial" pitchFamily="34" charset="0"/>
+                <a:ea typeface="Arial" pitchFamily="34" charset="-122"/>
+                <a:cs typeface="Arial" pitchFamily="34" charset="-120"/>
+              </a:rPr>
+              <a:t>songhyun</a:t>
+            </a:r>
+            <a:endParaRPr lang="en-US" sz="595" dirty="0"/>
+          </a:p>
+          <a:p>
+            <a:pPr indent="0" marL="0">
+              <a:lnSpc>
+                <a:spcPct val="90000"/>
+              </a:lnSpc>
+              <a:buNone/>
+            </a:pPr>
+            <a:r>
+              <a:rPr lang="en-US" sz="1360" b="1" i="1" dirty="0">
+                <a:solidFill>
+                  <a:srgbClr val="00A651"/>
+                </a:solidFill>
+                <a:latin typeface="Arial" pitchFamily="34" charset="0"/>
+                <a:ea typeface="Arial" pitchFamily="34" charset="-122"/>
+                <a:cs typeface="Arial" pitchFamily="34" charset="-120"/>
+              </a:rPr>
+              <a:t>GlowOne</a:t>
+            </a:r>
+            <a:pPr indent="0" marL="0">
+              <a:lnSpc>
+                <a:spcPct val="90000"/>
+              </a:lnSpc>
+              <a:buNone/>
+            </a:pPr>
+            <a:r>
+              <a:rPr lang="en-US" sz="1105" b="1" dirty="0">
+                <a:solidFill>
+                  <a:srgbClr val="E8420B"/>
+                </a:solidFill>
+                <a:latin typeface="Arial" pitchFamily="34" charset="0"/>
+                <a:ea typeface="Arial" pitchFamily="34" charset="-122"/>
+                <a:cs typeface="Arial" pitchFamily="34" charset="-120"/>
+              </a:rPr>
+              <a:t> ”</a:t>
+            </a:r>
+            <a:endParaRPr lang="en-US" sz="595" dirty="0"/>
+          </a:p>
+        </p:txBody>
+      </p:sp>
+      <p:sp>
+        <p:nvSpPr>
+          <p:cNvPr id="4" name="Shape 2"/>
+          <p:cNvSpPr/>
+          <p:nvPr/>
+        </p:nvSpPr>
+        <p:spPr>
+          <a:xfrm>
+            <a:off x="228600" y="713232"/>
+            <a:ext cx="8686800" cy="0"/>
+          </a:xfrm>
+          <a:prstGeom prst="line">
+            <a:avLst/>
+          </a:prstGeom>
+          <a:noFill/>
+          <a:ln w="12700">
+            <a:solidFill>
+              <a:srgbClr val="808080"/>
+            </a:solidFill>
+            <a:prstDash val="solid"/>
+          </a:ln>
+        </p:spPr>
+      </p:sp>
+      <p:sp>
+        <p:nvSpPr>
+          <p:cNvPr id="5" name="Text 3"/>
+          <p:cNvSpPr/>
+          <p:nvPr/>
+        </p:nvSpPr>
+        <p:spPr>
+          <a:xfrm>
+            <a:off x="365760" y="914400"/>
+            <a:ext cx="8229600" cy="320040"/>
+          </a:xfrm>
+          <a:prstGeom prst="rect">
+            <a:avLst/>
+          </a:prstGeom>
+          <a:noFill/>
+          <a:ln/>
+        </p:spPr>
+        <p:txBody>
+          <a:bodyPr wrap="square" lIns="0" tIns="0" rIns="0" bIns="0" rtlCol="0" anchor="ctr"/>
+          <a:lstStyle/>
+          <a:p>
+            <a:pPr algn="l" indent="0" marL="0">
+              <a:buNone/>
+            </a:pPr>
+            <a:r>
+              <a:rPr lang="en-US" sz="1300" b="1" dirty="0">
+                <a:solidFill>
+                  <a:srgbClr val="000000"/>
+                </a:solidFill>
+                <a:latin typeface="Arial" pitchFamily="34" charset="0"/>
+                <a:ea typeface="Arial" pitchFamily="34" charset="-122"/>
+                <a:cs typeface="Arial" pitchFamily="34" charset="-120"/>
+              </a:rPr>
+              <a:t>2.  재원</a:t>
+            </a:r>
+            <a:endParaRPr lang="en-US" sz="1300" dirty="0"/>
+          </a:p>
+        </p:txBody>
+      </p:sp>
+      <p:graphicFrame>
+        <p:nvGraphicFramePr>
+          <p:cNvPr id="3" name="Table 0"/>
           <p:cNvGraphicFramePr>
             <a:graphicFrameLocks noGrp="1"/>
           </p:cNvGraphicFramePr>
@@ -1648,7 +4736,7 @@
                           <a:ea typeface="Arial" pitchFamily="34" charset="-122"/>
                           <a:cs typeface="Arial" pitchFamily="34" charset="-120"/>
                         </a:rPr>
-                        <a:t>[ 공급사 ]</a:t>
+                        <a:t>Shin Kwang Chemicals</a:t>
                       </a:r>
                       <a:endParaRPr lang="en-US" sz="1050" dirty="0">
                         <a:latin typeface="Arial" charset="0"/>
@@ -1716,7 +4804,7 @@
                           <a:ea typeface="Arial" pitchFamily="34" charset="-122"/>
                           <a:cs typeface="Arial" pitchFamily="34" charset="-120"/>
                         </a:rPr>
-                        <a:t>[ Type ]</a:t>
+                        <a:t>HB-2U1S-04</a:t>
                       </a:r>
                       <a:endParaRPr lang="en-US" sz="1050" dirty="0">
                         <a:latin typeface="Arial" charset="0"/>
@@ -1854,7 +4942,7 @@
                           <a:ea typeface="Arial" pitchFamily="34" charset="-122"/>
                           <a:cs typeface="Arial" pitchFamily="34" charset="-120"/>
                         </a:rPr>
-                        <a:t>[ 공급사 ]</a:t>
+                        <a:t>Micro Line</a:t>
                       </a:r>
                       <a:endParaRPr lang="en-US" sz="1050" dirty="0">
                         <a:latin typeface="Arial" charset="0"/>
@@ -1922,7 +5010,7 @@
                           <a:ea typeface="Arial" pitchFamily="34" charset="-122"/>
                           <a:cs typeface="Arial" pitchFamily="34" charset="-120"/>
                         </a:rPr>
-                        <a:t>[ Type ]</a:t>
+                        <a:t>Niddle-Valve</a:t>
                       </a:r>
                       <a:endParaRPr lang="en-US" sz="1050" dirty="0">
                         <a:latin typeface="Arial" charset="0"/>
@@ -2011,7 +5099,7 @@
                 <a:ea typeface="Arial" pitchFamily="34" charset="-122"/>
                 <a:cs typeface="Arial" pitchFamily="34" charset="-120"/>
               </a:rPr>
-              <a:t>2.  Base Parameter</a:t>
+              <a:t>3.  Base Parameter</a:t>
             </a:r>
             <a:endParaRPr lang="en-US" sz="1300" dirty="0"/>
           </a:p>
@@ -2019,7 +5107,7 @@
       </p:sp>
       <p:graphicFrame>
         <p:nvGraphicFramePr>
-          <p:cNvPr id="3" name="Table 1"/>
+          <p:cNvPr id="5" name="Table 1"/>
           <p:cNvGraphicFramePr>
             <a:graphicFrameLocks noGrp="1"/>
           </p:cNvGraphicFramePr>
@@ -2344,7 +5432,7 @@
                           <a:ea typeface="Arial" pitchFamily="34" charset="-122"/>
                           <a:cs typeface="Arial" pitchFamily="34" charset="-120"/>
                         </a:rPr>
-                        <a:t>[ ]</a:t>
+                        <a:t>4 ~ 9</a:t>
                       </a:r>
                       <a:endParaRPr lang="en-US" sz="1050" dirty="0">
                         <a:latin typeface="Arial" charset="0"/>
@@ -2412,7 +5500,7 @@
                           <a:ea typeface="Arial" pitchFamily="34" charset="-122"/>
                           <a:cs typeface="Arial" pitchFamily="34" charset="-120"/>
                         </a:rPr>
-                        <a:t>[ ]</a:t>
+                        <a:t>40~70</a:t>
                       </a:r>
                       <a:endParaRPr lang="en-US" sz="1050" dirty="0">
                         <a:latin typeface="Arial" charset="0"/>
@@ -2480,7 +5568,7 @@
                           <a:ea typeface="Arial" pitchFamily="34" charset="-122"/>
                           <a:cs typeface="Arial" pitchFamily="34" charset="-120"/>
                         </a:rPr>
-                        <a:t>[ ]</a:t>
+                        <a:t>25 ~ 35</a:t>
                       </a:r>
                       <a:endParaRPr lang="en-US" sz="1050" dirty="0">
                         <a:latin typeface="Arial" charset="0"/>
@@ -2569,7 +5657,7 @@
                 <a:ea typeface="Arial" pitchFamily="34" charset="-122"/>
                 <a:cs typeface="Arial" pitchFamily="34" charset="-120"/>
               </a:rPr>
-              <a:t>※ JG EV 라인과 동일 코팅 설비 기준 — SX3K 확정 사양 수신 후 업데이트 예정</a:t>
+              <a:t>※ JG EV 라인과 동일 코팅 설비 · 재원 · Base Parameter 적용</a:t>
             </a:r>
             <a:endParaRPr lang="en-US" sz="1000" dirty="0"/>
           </a:p>
@@ -2670,7 +5758,7 @@
                 <a:ea typeface="Arial" pitchFamily="34" charset="-122"/>
                 <a:cs typeface="Arial" pitchFamily="34" charset="-120"/>
               </a:rPr>
-              <a:t>1</a:t>
+              <a:t>2</a:t>
             </a:r>
             <a:endParaRPr lang="en-US" sz="900" dirty="0"/>
           </a:p>
@@ -2748,9 +5836,9 @@
 </p:sld>
 </file>
 
-<file path=ppt/slides/slide2.xml><?xml version="1.0" encoding="utf-8"?>
+<file path=ppt/slides/slide3.xml><?xml version="1.0" encoding="utf-8"?>
 <p:sld xmlns:a="http://schemas.openxmlformats.org/drawingml/2006/main" xmlns:r="http://schemas.openxmlformats.org/officeDocument/2006/relationships" xmlns:p="http://schemas.openxmlformats.org/presentationml/2006/main">
-  <p:cSld name="Slide 2">
+  <p:cSld name="Slide 3">
     <p:spTree>
       <p:nvGrpSpPr>
         <p:cNvPr id="1" name=""/>
@@ -2953,7 +6041,7 @@
                 <a:ea typeface="Arial" pitchFamily="34" charset="-122"/>
                 <a:cs typeface="Arial" pitchFamily="34" charset="-120"/>
               </a:rPr>
-              <a:t>3.  부위별 코팅 두께 측정</a:t>
+              <a:t>4.  부위별 코팅 두께 측정</a:t>
             </a:r>
             <a:endParaRPr lang="en-US" sz="1300" dirty="0"/>
           </a:p>
@@ -2961,7 +6049,7 @@
       </p:sp>
       <p:graphicFrame>
         <p:nvGraphicFramePr>
-          <p:cNvPr id="3" name="Table 0"/>
+          <p:cNvPr id="4" name="Table 0"/>
           <p:cNvGraphicFramePr>
             <a:graphicFrameLocks noGrp="1"/>
           </p:cNvGraphicFramePr>
@@ -4540,7 +7628,7 @@
                 <a:ea typeface="Arial" pitchFamily="34" charset="-122"/>
                 <a:cs typeface="Arial" pitchFamily="34" charset="-120"/>
               </a:rPr>
-              <a:t>2</a:t>
+              <a:t>3</a:t>
             </a:r>
             <a:endParaRPr lang="en-US" sz="900" dirty="0"/>
           </a:p>
@@ -4574,846 +7662,6 @@
       <p:sp>
         <p:nvSpPr>
           <p:cNvPr id="11" name="Text 8"/>
-          <p:cNvSpPr/>
-          <p:nvPr/>
-        </p:nvSpPr>
-        <p:spPr>
-          <a:xfrm>
-            <a:off x="7818120" y="6492240"/>
-            <a:ext cx="1051560" cy="237744"/>
-          </a:xfrm>
-          <a:prstGeom prst="rect">
-            <a:avLst/>
-          </a:prstGeom>
-          <a:noFill/>
-          <a:ln/>
-        </p:spPr>
-        <p:txBody>
-          <a:bodyPr wrap="square" lIns="0" tIns="0" rIns="0" bIns="0" rtlCol="0" anchor="ctr"/>
-          <a:lstStyle/>
-          <a:p>
-            <a:pPr algn="ctr" indent="0" marL="0">
-              <a:buNone/>
-            </a:pPr>
-            <a:r>
-              <a:rPr lang="en-US" sz="800" b="1" dirty="0">
-                <a:solidFill>
-                  <a:srgbClr val="C00000"/>
-                </a:solidFill>
-                <a:latin typeface="Arial" pitchFamily="34" charset="0"/>
-                <a:ea typeface="Arial" pitchFamily="34" charset="-122"/>
-                <a:cs typeface="Arial" pitchFamily="34" charset="-120"/>
-              </a:rPr>
-              <a:t>Confidential</a:t>
-            </a:r>
-            <a:endParaRPr lang="en-US" sz="800" dirty="0"/>
-          </a:p>
-        </p:txBody>
-      </p:sp>
-    </p:spTree>
-  </p:cSld>
-  <p:clrMapOvr>
-    <a:masterClrMapping/>
-  </p:clrMapOvr>
-</p:sld>
-</file>
-
-<file path=ppt/slides/slide3.xml><?xml version="1.0" encoding="utf-8"?>
-<p:sld xmlns:a="http://schemas.openxmlformats.org/drawingml/2006/main" xmlns:r="http://schemas.openxmlformats.org/officeDocument/2006/relationships" xmlns:p="http://schemas.openxmlformats.org/presentationml/2006/main">
-  <p:cSld name="Slide 3">
-    <p:spTree>
-      <p:nvGrpSpPr>
-        <p:cNvPr id="1" name=""/>
-        <p:cNvGrpSpPr/>
-        <p:nvPr/>
-      </p:nvGrpSpPr>
-      <p:grpSpPr>
-        <a:xfrm>
-          <a:off x="0" y="0"/>
-          <a:ext cx="0" cy="0"/>
-          <a:chOff x="0" y="0"/>
-          <a:chExt cx="0" cy="0"/>
-        </a:xfrm>
-      </p:grpSpPr>
-      <p:sp>
-        <p:nvSpPr>
-          <p:cNvPr id="2" name="Text 0"/>
-          <p:cNvSpPr/>
-          <p:nvPr/>
-        </p:nvSpPr>
-        <p:spPr>
-          <a:xfrm>
-            <a:off x="320040" y="201168"/>
-            <a:ext cx="6400800" cy="457200"/>
-          </a:xfrm>
-          <a:prstGeom prst="rect">
-            <a:avLst/>
-          </a:prstGeom>
-          <a:noFill/>
-          <a:ln/>
-        </p:spPr>
-        <p:txBody>
-          <a:bodyPr wrap="square" lIns="0" tIns="0" rIns="0" bIns="0" rtlCol="0" anchor="ctr"/>
-          <a:lstStyle/>
-          <a:p>
-            <a:pPr algn="l" indent="0" marL="0">
-              <a:buNone/>
-            </a:pPr>
-            <a:r>
-              <a:rPr lang="en-US" sz="1400" b="1" dirty="0">
-                <a:solidFill>
-                  <a:srgbClr val="000000"/>
-                </a:solidFill>
-                <a:latin typeface="Arial" pitchFamily="34" charset="0"/>
-                <a:ea typeface="Arial" pitchFamily="34" charset="-122"/>
-                <a:cs typeface="Arial" pitchFamily="34" charset="-120"/>
-              </a:rPr>
-              <a:t>■ </a:t>
-            </a:r>
-            <a:pPr algn="l" indent="0" marL="0">
-              <a:buNone/>
-            </a:pPr>
-            <a:r>
-              <a:rPr lang="en-US" sz="1800" b="1" dirty="0">
-                <a:solidFill>
-                  <a:srgbClr val="000000"/>
-                </a:solidFill>
-                <a:latin typeface="Arial" pitchFamily="34" charset="0"/>
-                <a:ea typeface="Arial" pitchFamily="34" charset="-122"/>
-                <a:cs typeface="Arial" pitchFamily="34" charset="-120"/>
-              </a:rPr>
-              <a:t>SX3K 코팅 Section 자료</a:t>
-            </a:r>
-            <a:endParaRPr lang="en-US" sz="1400" dirty="0"/>
-          </a:p>
-        </p:txBody>
-      </p:sp>
-      <p:sp>
-        <p:nvSpPr>
-          <p:cNvPr id="3" name="Text 1"/>
-          <p:cNvSpPr/>
-          <p:nvPr/>
-        </p:nvSpPr>
-        <p:spPr>
-          <a:xfrm>
-            <a:off x="7406640" y="164592"/>
-            <a:ext cx="1709928" cy="481889"/>
-          </a:xfrm>
-          <a:prstGeom prst="rect">
-            <a:avLst/>
-          </a:prstGeom>
-          <a:noFill/>
-          <a:ln/>
-        </p:spPr>
-        <p:txBody>
-          <a:bodyPr wrap="square" lIns="0" tIns="0" rIns="0" bIns="0" rtlCol="0" anchor="ctr"/>
-          <a:lstStyle/>
-          <a:p>
-            <a:pPr indent="0" marL="0">
-              <a:lnSpc>
-                <a:spcPct val="90000"/>
-              </a:lnSpc>
-              <a:buNone/>
-            </a:pPr>
-            <a:r>
-              <a:rPr lang="en-US" sz="595" i="1" dirty="0">
-                <a:solidFill>
-                  <a:srgbClr val="1F4E79"/>
-                </a:solidFill>
-                <a:latin typeface="Arial" pitchFamily="34" charset="0"/>
-                <a:ea typeface="Arial" pitchFamily="34" charset="-122"/>
-                <a:cs typeface="Arial" pitchFamily="34" charset="-120"/>
-              </a:rPr>
-              <a:t>songhyun</a:t>
-            </a:r>
-            <a:endParaRPr lang="en-US" sz="595" dirty="0"/>
-          </a:p>
-          <a:p>
-            <a:pPr indent="0" marL="0">
-              <a:lnSpc>
-                <a:spcPct val="90000"/>
-              </a:lnSpc>
-              <a:buNone/>
-            </a:pPr>
-            <a:r>
-              <a:rPr lang="en-US" sz="1360" b="1" i="1" dirty="0">
-                <a:solidFill>
-                  <a:srgbClr val="00A651"/>
-                </a:solidFill>
-                <a:latin typeface="Arial" pitchFamily="34" charset="0"/>
-                <a:ea typeface="Arial" pitchFamily="34" charset="-122"/>
-                <a:cs typeface="Arial" pitchFamily="34" charset="-120"/>
-              </a:rPr>
-              <a:t>GlowOne</a:t>
-            </a:r>
-            <a:pPr indent="0" marL="0">
-              <a:lnSpc>
-                <a:spcPct val="90000"/>
-              </a:lnSpc>
-              <a:buNone/>
-            </a:pPr>
-            <a:r>
-              <a:rPr lang="en-US" sz="1105" b="1" dirty="0">
-                <a:solidFill>
-                  <a:srgbClr val="E8420B"/>
-                </a:solidFill>
-                <a:latin typeface="Arial" pitchFamily="34" charset="0"/>
-                <a:ea typeface="Arial" pitchFamily="34" charset="-122"/>
-                <a:cs typeface="Arial" pitchFamily="34" charset="-120"/>
-              </a:rPr>
-              <a:t> ”</a:t>
-            </a:r>
-            <a:endParaRPr lang="en-US" sz="595" dirty="0"/>
-          </a:p>
-        </p:txBody>
-      </p:sp>
-      <p:sp>
-        <p:nvSpPr>
-          <p:cNvPr id="4" name="Shape 2"/>
-          <p:cNvSpPr/>
-          <p:nvPr/>
-        </p:nvSpPr>
-        <p:spPr>
-          <a:xfrm>
-            <a:off x="228600" y="713232"/>
-            <a:ext cx="8686800" cy="0"/>
-          </a:xfrm>
-          <a:prstGeom prst="line">
-            <a:avLst/>
-          </a:prstGeom>
-          <a:noFill/>
-          <a:ln w="12700">
-            <a:solidFill>
-              <a:srgbClr val="808080"/>
-            </a:solidFill>
-            <a:prstDash val="solid"/>
-          </a:ln>
-        </p:spPr>
-      </p:sp>
-      <p:sp>
-        <p:nvSpPr>
-          <p:cNvPr id="5" name="Text 3"/>
-          <p:cNvSpPr/>
-          <p:nvPr/>
-        </p:nvSpPr>
-        <p:spPr>
-          <a:xfrm>
-            <a:off x="365760" y="914400"/>
-            <a:ext cx="8229600" cy="320040"/>
-          </a:xfrm>
-          <a:prstGeom prst="rect">
-            <a:avLst/>
-          </a:prstGeom>
-          <a:noFill/>
-          <a:ln/>
-        </p:spPr>
-        <p:txBody>
-          <a:bodyPr wrap="square" lIns="0" tIns="0" rIns="0" bIns="0" rtlCol="0" anchor="ctr"/>
-          <a:lstStyle/>
-          <a:p>
-            <a:pPr algn="l" indent="0" marL="0">
-              <a:buNone/>
-            </a:pPr>
-            <a:r>
-              <a:rPr lang="en-US" sz="1300" b="1" dirty="0">
-                <a:solidFill>
-                  <a:srgbClr val="000000"/>
-                </a:solidFill>
-                <a:latin typeface="Arial" pitchFamily="34" charset="0"/>
-                <a:ea typeface="Arial" pitchFamily="34" charset="-122"/>
-                <a:cs typeface="Arial" pitchFamily="34" charset="-120"/>
-              </a:rPr>
-              <a:t>4.  NTC 도포 방식 검토 (설비 자동 도포 → Manual 도포)</a:t>
-            </a:r>
-            <a:endParaRPr lang="en-US" sz="1300" dirty="0"/>
-          </a:p>
-        </p:txBody>
-      </p:sp>
-      <p:sp>
-        <p:nvSpPr>
-          <p:cNvPr id="6" name="Shape 4"/>
-          <p:cNvSpPr/>
-          <p:nvPr/>
-        </p:nvSpPr>
-        <p:spPr>
-          <a:xfrm>
-            <a:off x="365760" y="1371600"/>
-            <a:ext cx="3291840" cy="2011680"/>
-          </a:xfrm>
-          <a:prstGeom prst="rect">
-            <a:avLst/>
-          </a:prstGeom>
-          <a:solidFill>
-            <a:srgbClr val="F7F7F7"/>
-          </a:solidFill>
-          <a:ln w="12700">
-            <a:solidFill>
-              <a:srgbClr val="BFBFBF"/>
-            </a:solidFill>
-            <a:prstDash val="dash"/>
-          </a:ln>
-        </p:spPr>
-      </p:sp>
-      <p:sp>
-        <p:nvSpPr>
-          <p:cNvPr id="7" name="Text 5"/>
-          <p:cNvSpPr/>
-          <p:nvPr/>
-        </p:nvSpPr>
-        <p:spPr>
-          <a:xfrm>
-            <a:off x="365760" y="2103120"/>
-            <a:ext cx="3291840" cy="548640"/>
-          </a:xfrm>
-          <a:prstGeom prst="rect">
-            <a:avLst/>
-          </a:prstGeom>
-          <a:noFill/>
-          <a:ln/>
-        </p:spPr>
-        <p:txBody>
-          <a:bodyPr wrap="square" lIns="0" tIns="0" rIns="0" bIns="0" rtlCol="0" anchor="ctr"/>
-          <a:lstStyle/>
-          <a:p>
-            <a:pPr algn="ctr" indent="0" marL="0">
-              <a:buNone/>
-            </a:pPr>
-            <a:r>
-              <a:rPr lang="en-US" sz="1100" dirty="0">
-                <a:solidFill>
-                  <a:srgbClr val="909090"/>
-                </a:solidFill>
-                <a:latin typeface="Arial" pitchFamily="34" charset="0"/>
-                <a:ea typeface="Arial" pitchFamily="34" charset="-122"/>
-                <a:cs typeface="Arial" pitchFamily="34" charset="-120"/>
-              </a:rPr>
-              <a:t>NTC 외관 사진 삽입</a:t>
-            </a:r>
-            <a:endParaRPr lang="en-US" sz="1100" dirty="0"/>
-          </a:p>
-        </p:txBody>
-      </p:sp>
-      <p:sp>
-        <p:nvSpPr>
-          <p:cNvPr id="8" name="Shape 6"/>
-          <p:cNvSpPr/>
-          <p:nvPr/>
-        </p:nvSpPr>
-        <p:spPr>
-          <a:xfrm>
-            <a:off x="365760" y="3520440"/>
-            <a:ext cx="3291840" cy="2011680"/>
-          </a:xfrm>
-          <a:prstGeom prst="rect">
-            <a:avLst/>
-          </a:prstGeom>
-          <a:solidFill>
-            <a:srgbClr val="F7F7F7"/>
-          </a:solidFill>
-          <a:ln w="12700">
-            <a:solidFill>
-              <a:srgbClr val="BFBFBF"/>
-            </a:solidFill>
-            <a:prstDash val="dash"/>
-          </a:ln>
-        </p:spPr>
-      </p:sp>
-      <p:sp>
-        <p:nvSpPr>
-          <p:cNvPr id="9" name="Text 7"/>
-          <p:cNvSpPr/>
-          <p:nvPr/>
-        </p:nvSpPr>
-        <p:spPr>
-          <a:xfrm>
-            <a:off x="365760" y="4251960"/>
-            <a:ext cx="3291840" cy="548640"/>
-          </a:xfrm>
-          <a:prstGeom prst="rect">
-            <a:avLst/>
-          </a:prstGeom>
-          <a:noFill/>
-          <a:ln/>
-        </p:spPr>
-        <p:txBody>
-          <a:bodyPr wrap="square" lIns="0" tIns="0" rIns="0" bIns="0" rtlCol="0" anchor="ctr"/>
-          <a:lstStyle/>
-          <a:p>
-            <a:pPr algn="ctr" indent="0" marL="0">
-              <a:buNone/>
-            </a:pPr>
-            <a:r>
-              <a:rPr lang="en-US" sz="1100" dirty="0">
-                <a:solidFill>
-                  <a:srgbClr val="909090"/>
-                </a:solidFill>
-                <a:latin typeface="Arial" pitchFamily="34" charset="0"/>
-                <a:ea typeface="Arial" pitchFamily="34" charset="-122"/>
-                <a:cs typeface="Arial" pitchFamily="34" charset="-120"/>
-              </a:rPr>
-              <a:t>단면 사진 삽입</a:t>
-            </a:r>
-            <a:endParaRPr lang="en-US" sz="1100" dirty="0"/>
-          </a:p>
-          <a:p>
-            <a:pPr algn="ctr" indent="0" marL="0">
-              <a:buNone/>
-            </a:pPr>
-            <a:r>
-              <a:rPr lang="en-US" sz="1100" dirty="0">
-                <a:solidFill>
-                  <a:srgbClr val="909090"/>
-                </a:solidFill>
-                <a:latin typeface="Arial" pitchFamily="34" charset="0"/>
-                <a:ea typeface="Arial" pitchFamily="34" charset="-122"/>
-                <a:cs typeface="Arial" pitchFamily="34" charset="-120"/>
-              </a:rPr>
-              <a:t>(422 / 527 / 119 um)</a:t>
-            </a:r>
-            <a:endParaRPr lang="en-US" sz="1100" dirty="0"/>
-          </a:p>
-        </p:txBody>
-      </p:sp>
-      <p:sp>
-        <p:nvSpPr>
-          <p:cNvPr id="10" name="Text 8"/>
-          <p:cNvSpPr/>
-          <p:nvPr/>
-        </p:nvSpPr>
-        <p:spPr>
-          <a:xfrm>
-            <a:off x="365760" y="5596128"/>
-            <a:ext cx="3291840" cy="256032"/>
-          </a:xfrm>
-          <a:prstGeom prst="rect">
-            <a:avLst/>
-          </a:prstGeom>
-          <a:noFill/>
-          <a:ln/>
-        </p:spPr>
-        <p:txBody>
-          <a:bodyPr wrap="square" lIns="0" tIns="0" rIns="0" bIns="0" rtlCol="0" anchor="ctr"/>
-          <a:lstStyle/>
-          <a:p>
-            <a:pPr algn="ctr" indent="0" marL="0">
-              <a:buNone/>
-            </a:pPr>
-            <a:r>
-              <a:rPr lang="en-US" sz="900" b="1" dirty="0">
-                <a:solidFill>
-                  <a:srgbClr val="C00000"/>
-                </a:solidFill>
-                <a:latin typeface="Arial" pitchFamily="34" charset="0"/>
-                <a:ea typeface="Arial" pitchFamily="34" charset="-122"/>
-                <a:cs typeface="Arial" pitchFamily="34" charset="-120"/>
-              </a:rPr>
-              <a:t>&lt; 설비 자동 도포 시 편차 불량 예시 &gt;</a:t>
-            </a:r>
-            <a:endParaRPr lang="en-US" sz="900" dirty="0"/>
-          </a:p>
-        </p:txBody>
-      </p:sp>
-      <p:sp>
-        <p:nvSpPr>
-          <p:cNvPr id="11" name="Shape 9"/>
-          <p:cNvSpPr/>
-          <p:nvPr/>
-        </p:nvSpPr>
-        <p:spPr>
-          <a:xfrm>
-            <a:off x="3886200" y="1371600"/>
-            <a:ext cx="4892040" cy="4160520"/>
-          </a:xfrm>
-          <a:prstGeom prst="rect">
-            <a:avLst/>
-          </a:prstGeom>
-          <a:solidFill>
-            <a:srgbClr val="FFFFFF"/>
-          </a:solidFill>
-          <a:ln w="12700">
-            <a:solidFill>
-              <a:srgbClr val="808080"/>
-            </a:solidFill>
-            <a:prstDash val="solid"/>
-          </a:ln>
-        </p:spPr>
-      </p:sp>
-      <p:sp>
-        <p:nvSpPr>
-          <p:cNvPr id="12" name="Text 10"/>
-          <p:cNvSpPr/>
-          <p:nvPr/>
-        </p:nvSpPr>
-        <p:spPr>
-          <a:xfrm>
-            <a:off x="4069080" y="1508760"/>
-            <a:ext cx="4572000" cy="3886200"/>
-          </a:xfrm>
-          <a:prstGeom prst="rect">
-            <a:avLst/>
-          </a:prstGeom>
-          <a:noFill/>
-          <a:ln/>
-        </p:spPr>
-        <p:txBody>
-          <a:bodyPr wrap="square" lIns="0" tIns="0" rIns="0" bIns="0" rtlCol="0" anchor="t"/>
-          <a:lstStyle/>
-          <a:p>
-            <a:pPr algn="l" indent="0" marL="0">
-              <a:buNone/>
-            </a:pPr>
-            <a:r>
-              <a:rPr lang="en-US" sz="1200" b="1" dirty="0">
-                <a:solidFill>
-                  <a:srgbClr val="000000"/>
-                </a:solidFill>
-                <a:latin typeface="Arial" pitchFamily="34" charset="0"/>
-                <a:ea typeface="Arial" pitchFamily="34" charset="-122"/>
-                <a:cs typeface="Arial" pitchFamily="34" charset="-120"/>
-              </a:rPr>
-              <a:t>□ 설비 자동 도포 시 문제점</a:t>
-            </a:r>
-            <a:endParaRPr lang="en-US" sz="1200" dirty="0"/>
-          </a:p>
-          <a:p>
-            <a:pPr algn="l" indent="0" marL="0">
-              <a:buNone/>
-            </a:pPr>
-            <a:endParaRPr lang="en-US" sz="1200" dirty="0"/>
-          </a:p>
-          <a:p>
-            <a:pPr algn="l" indent="0" marL="0">
-              <a:buNone/>
-            </a:pPr>
-            <a:r>
-              <a:rPr lang="en-US" sz="1100" dirty="0">
-                <a:solidFill>
-                  <a:srgbClr val="000000"/>
-                </a:solidFill>
-                <a:latin typeface="Arial" pitchFamily="34" charset="0"/>
-                <a:ea typeface="Arial" pitchFamily="34" charset="-122"/>
-                <a:cs typeface="Arial" pitchFamily="34" charset="-120"/>
-              </a:rPr>
-              <a:t>  - NTC 소자 기준 좌/우 코팅 두께 편차 발생</a:t>
-            </a:r>
-            <a:endParaRPr lang="en-US" sz="1200" dirty="0"/>
-          </a:p>
-          <a:p>
-            <a:pPr algn="l" indent="0" marL="0">
-              <a:buNone/>
-            </a:pPr>
-            <a:r>
-              <a:rPr lang="en-US" sz="1100" dirty="0">
-                <a:solidFill>
-                  <a:srgbClr val="000000"/>
-                </a:solidFill>
-                <a:latin typeface="Arial" pitchFamily="34" charset="0"/>
-                <a:ea typeface="Arial" pitchFamily="34" charset="-122"/>
-                <a:cs typeface="Arial" pitchFamily="34" charset="-120"/>
-              </a:rPr>
-              <a:t>    (예: 좌 422um / 상 527um / 우 119um)</a:t>
-            </a:r>
-            <a:endParaRPr lang="en-US" sz="1200" dirty="0"/>
-          </a:p>
-          <a:p>
-            <a:pPr algn="l" indent="0" marL="0">
-              <a:buNone/>
-            </a:pPr>
-            <a:r>
-              <a:rPr lang="en-US" sz="1100" dirty="0">
-                <a:solidFill>
-                  <a:srgbClr val="000000"/>
-                </a:solidFill>
-                <a:latin typeface="Arial" pitchFamily="34" charset="0"/>
-                <a:ea typeface="Arial" pitchFamily="34" charset="-122"/>
-                <a:cs typeface="Arial" pitchFamily="34" charset="-120"/>
-              </a:rPr>
-              <a:t>  - 노즐 토출 경로 특성상 소자 한쪽으로 코팅액 쏠림 발생</a:t>
-            </a:r>
-            <a:endParaRPr lang="en-US" sz="1200" dirty="0"/>
-          </a:p>
-          <a:p>
-            <a:pPr algn="l" indent="0" marL="0">
-              <a:buNone/>
-            </a:pPr>
-            <a:r>
-              <a:rPr lang="en-US" sz="1100" dirty="0">
-                <a:solidFill>
-                  <a:srgbClr val="000000"/>
-                </a:solidFill>
-                <a:latin typeface="Arial" pitchFamily="34" charset="0"/>
-                <a:ea typeface="Arial" pitchFamily="34" charset="-122"/>
-                <a:cs typeface="Arial" pitchFamily="34" charset="-120"/>
-              </a:rPr>
-              <a:t>    → 한쪽 과도포 / 반대쪽 박도포</a:t>
-            </a:r>
-            <a:endParaRPr lang="en-US" sz="1200" dirty="0"/>
-          </a:p>
-          <a:p>
-            <a:pPr algn="l" indent="0" marL="0">
-              <a:buNone/>
-            </a:pPr>
-            <a:r>
-              <a:rPr lang="en-US" sz="1100" dirty="0">
-                <a:solidFill>
-                  <a:srgbClr val="000000"/>
-                </a:solidFill>
-                <a:latin typeface="Arial" pitchFamily="34" charset="0"/>
-                <a:ea typeface="Arial" pitchFamily="34" charset="-122"/>
-                <a:cs typeface="Arial" pitchFamily="34" charset="-120"/>
-              </a:rPr>
-              <a:t>  - 박도포부는 소자 보호·절연 성능 저하 우려</a:t>
-            </a:r>
-            <a:endParaRPr lang="en-US" sz="1200" dirty="0"/>
-          </a:p>
-          <a:p>
-            <a:pPr algn="l" indent="0" marL="0">
-              <a:buNone/>
-            </a:pPr>
-            <a:endParaRPr lang="en-US" sz="1200" dirty="0"/>
-          </a:p>
-          <a:p>
-            <a:pPr algn="l" indent="0" marL="0">
-              <a:buNone/>
-            </a:pPr>
-            <a:r>
-              <a:rPr lang="en-US" sz="1200" b="1" dirty="0">
-                <a:solidFill>
-                  <a:srgbClr val="000000"/>
-                </a:solidFill>
-                <a:latin typeface="Arial" pitchFamily="34" charset="0"/>
-                <a:ea typeface="Arial" pitchFamily="34" charset="-122"/>
-                <a:cs typeface="Arial" pitchFamily="34" charset="-120"/>
-              </a:rPr>
-              <a:t>□ 개선 방안 : NTC부 Manual 도포 적용</a:t>
-            </a:r>
-            <a:endParaRPr lang="en-US" sz="1200" dirty="0"/>
-          </a:p>
-          <a:p>
-            <a:pPr algn="l" indent="0" marL="0">
-              <a:buNone/>
-            </a:pPr>
-            <a:endParaRPr lang="en-US" sz="1200" dirty="0"/>
-          </a:p>
-          <a:p>
-            <a:pPr algn="l" indent="0" marL="0">
-              <a:buNone/>
-            </a:pPr>
-            <a:r>
-              <a:rPr lang="en-US" sz="1100" dirty="0">
-                <a:solidFill>
-                  <a:srgbClr val="000000"/>
-                </a:solidFill>
-                <a:latin typeface="Arial" pitchFamily="34" charset="0"/>
-                <a:ea typeface="Arial" pitchFamily="34" charset="-122"/>
-                <a:cs typeface="Arial" pitchFamily="34" charset="-120"/>
-              </a:rPr>
-              <a:t>  - 소자 중심 기준 도포 위치/양 조절 가능</a:t>
-            </a:r>
-            <a:endParaRPr lang="en-US" sz="1200" dirty="0"/>
-          </a:p>
-          <a:p>
-            <a:pPr algn="l" indent="0" marL="0">
-              <a:buNone/>
-            </a:pPr>
-            <a:r>
-              <a:rPr lang="en-US" sz="1100" dirty="0">
-                <a:solidFill>
-                  <a:srgbClr val="000000"/>
-                </a:solidFill>
-                <a:latin typeface="Arial" pitchFamily="34" charset="0"/>
-                <a:ea typeface="Arial" pitchFamily="34" charset="-122"/>
-                <a:cs typeface="Arial" pitchFamily="34" charset="-120"/>
-              </a:rPr>
-              <a:t>    → 좌/우 균일한 돔 형상 확보</a:t>
-            </a:r>
-            <a:endParaRPr lang="en-US" sz="1200" dirty="0"/>
-          </a:p>
-          <a:p>
-            <a:pPr algn="l" indent="0" marL="0">
-              <a:buNone/>
-            </a:pPr>
-            <a:r>
-              <a:rPr lang="en-US" sz="1100" dirty="0">
-                <a:solidFill>
-                  <a:srgbClr val="000000"/>
-                </a:solidFill>
-                <a:latin typeface="Arial" pitchFamily="34" charset="0"/>
-                <a:ea typeface="Arial" pitchFamily="34" charset="-122"/>
-                <a:cs typeface="Arial" pitchFamily="34" charset="-120"/>
-              </a:rPr>
-              <a:t>  - 두께 편차 최소화로 소자 보호 품질 안정성 확보</a:t>
-            </a:r>
-            <a:endParaRPr lang="en-US" sz="1200" dirty="0"/>
-          </a:p>
-          <a:p>
-            <a:pPr algn="l" indent="0" marL="0">
-              <a:buNone/>
-            </a:pPr>
-            <a:endParaRPr lang="en-US" sz="1200" dirty="0"/>
-          </a:p>
-          <a:p>
-            <a:pPr algn="l" indent="0" marL="0">
-              <a:buNone/>
-            </a:pPr>
-            <a:r>
-              <a:rPr lang="en-US" sz="1200" b="1" dirty="0">
-                <a:solidFill>
-                  <a:srgbClr val="000000"/>
-                </a:solidFill>
-                <a:latin typeface="Arial" pitchFamily="34" charset="0"/>
-                <a:ea typeface="Arial" pitchFamily="34" charset="-122"/>
-                <a:cs typeface="Arial" pitchFamily="34" charset="-120"/>
-              </a:rPr>
-              <a:t>□ 결론 : </a:t>
-            </a:r>
-            <a:pPr algn="l" indent="0" marL="0">
-              <a:buNone/>
-            </a:pPr>
-            <a:r>
-              <a:rPr lang="en-US" sz="1200" b="1" dirty="0">
-                <a:solidFill>
-                  <a:srgbClr val="0070C0"/>
-                </a:solidFill>
-                <a:latin typeface="Arial" pitchFamily="34" charset="0"/>
-                <a:ea typeface="Arial" pitchFamily="34" charset="-122"/>
-                <a:cs typeface="Arial" pitchFamily="34" charset="-120"/>
-              </a:rPr>
-              <a:t>NTC부는 Manual 도포 적용 제안</a:t>
-            </a:r>
-            <a:endParaRPr lang="en-US" sz="1200" dirty="0"/>
-          </a:p>
-        </p:txBody>
-      </p:sp>
-      <p:sp>
-        <p:nvSpPr>
-          <p:cNvPr id="13" name="Shape 11"/>
-          <p:cNvSpPr/>
-          <p:nvPr/>
-        </p:nvSpPr>
-        <p:spPr>
-          <a:xfrm>
-            <a:off x="228600" y="6473952"/>
-            <a:ext cx="8686800" cy="0"/>
-          </a:xfrm>
-          <a:prstGeom prst="line">
-            <a:avLst/>
-          </a:prstGeom>
-          <a:noFill/>
-          <a:ln w="19050">
-            <a:solidFill>
-              <a:srgbClr val="00A651"/>
-            </a:solidFill>
-            <a:prstDash val="solid"/>
-          </a:ln>
-        </p:spPr>
-      </p:sp>
-      <p:sp>
-        <p:nvSpPr>
-          <p:cNvPr id="14" name="Text 12"/>
-          <p:cNvSpPr/>
-          <p:nvPr/>
-        </p:nvSpPr>
-        <p:spPr>
-          <a:xfrm>
-            <a:off x="228600" y="6510528"/>
-            <a:ext cx="4206240" cy="228600"/>
-          </a:xfrm>
-          <a:prstGeom prst="rect">
-            <a:avLst/>
-          </a:prstGeom>
-          <a:noFill/>
-          <a:ln/>
-        </p:spPr>
-        <p:txBody>
-          <a:bodyPr wrap="square" lIns="0" tIns="0" rIns="0" bIns="0" rtlCol="0" anchor="ctr"/>
-          <a:lstStyle/>
-          <a:p>
-            <a:pPr algn="l" indent="0" marL="0">
-              <a:buNone/>
-            </a:pPr>
-            <a:r>
-              <a:rPr lang="en-US" sz="750" i="1" dirty="0">
-                <a:solidFill>
-                  <a:srgbClr val="00A651"/>
-                </a:solidFill>
-                <a:latin typeface="Arial" pitchFamily="34" charset="0"/>
-                <a:ea typeface="Arial" pitchFamily="34" charset="-122"/>
-                <a:cs typeface="Arial" pitchFamily="34" charset="-120"/>
-              </a:rPr>
-              <a:t>Creative Solution Company with Advanced Technology</a:t>
-            </a:r>
-            <a:endParaRPr lang="en-US" sz="750" dirty="0"/>
-          </a:p>
-        </p:txBody>
-      </p:sp>
-      <p:sp>
-        <p:nvSpPr>
-          <p:cNvPr id="15" name="Text 13"/>
-          <p:cNvSpPr/>
-          <p:nvPr/>
-        </p:nvSpPr>
-        <p:spPr>
-          <a:xfrm>
-            <a:off x="4206240" y="6510528"/>
-            <a:ext cx="731520" cy="228600"/>
-          </a:xfrm>
-          <a:prstGeom prst="rect">
-            <a:avLst/>
-          </a:prstGeom>
-          <a:noFill/>
-          <a:ln/>
-        </p:spPr>
-        <p:txBody>
-          <a:bodyPr wrap="square" lIns="0" tIns="0" rIns="0" bIns="0" rtlCol="0" anchor="ctr"/>
-          <a:lstStyle/>
-          <a:p>
-            <a:pPr algn="ctr" indent="0" marL="0">
-              <a:buNone/>
-            </a:pPr>
-            <a:r>
-              <a:rPr lang="en-US" sz="900" dirty="0">
-                <a:solidFill>
-                  <a:srgbClr val="404040"/>
-                </a:solidFill>
-                <a:latin typeface="Arial" pitchFamily="34" charset="0"/>
-                <a:ea typeface="Arial" pitchFamily="34" charset="-122"/>
-                <a:cs typeface="Arial" pitchFamily="34" charset="-120"/>
-              </a:rPr>
-              <a:t>3</a:t>
-            </a:r>
-            <a:endParaRPr lang="en-US" sz="900" dirty="0"/>
-          </a:p>
-        </p:txBody>
-      </p:sp>
-      <p:sp>
-        <p:nvSpPr>
-          <p:cNvPr id="16" name="Shape 14"/>
-          <p:cNvSpPr/>
-          <p:nvPr/>
-        </p:nvSpPr>
-        <p:spPr>
-          <a:xfrm>
-            <a:off x="7818120" y="6492240"/>
-            <a:ext cx="1051560" cy="237744"/>
-          </a:xfrm>
-          <a:prstGeom prst="rect">
-            <a:avLst/>
-          </a:prstGeom>
-          <a:solidFill>
-            <a:srgbClr val="FFFFFF"/>
-          </a:solidFill>
-          <a:ln w="12700">
-            <a:solidFill>
-              <a:srgbClr val="C00000"/>
-            </a:solidFill>
-            <a:prstDash val="solid"/>
-          </a:ln>
-        </p:spPr>
-      </p:sp>
-      <p:sp>
-        <p:nvSpPr>
-          <p:cNvPr id="17" name="Text 15"/>
           <p:cNvSpPr/>
           <p:nvPr/>
         </p:nvSpPr>
@@ -5663,7 +7911,7 @@
                 <a:ea typeface="Arial" pitchFamily="34" charset="-122"/>
                 <a:cs typeface="Arial" pitchFamily="34" charset="-120"/>
               </a:rPr>
-              <a:t>5.  Summary</a:t>
+              <a:t>5.  NTC 도포 방식 검토 (설비 자동 도포 → Manual 도포)</a:t>
             </a:r>
             <a:endParaRPr lang="en-US" sz="1300" dirty="0"/>
           </a:p>
@@ -5671,14 +7919,223 @@
       </p:sp>
       <p:sp>
         <p:nvSpPr>
-          <p:cNvPr id="6" name="Text 4"/>
+          <p:cNvPr id="6" name="Shape 4"/>
           <p:cNvSpPr/>
           <p:nvPr/>
         </p:nvSpPr>
         <p:spPr>
           <a:xfrm>
-            <a:off x="548640" y="1371600"/>
-            <a:ext cx="8138160" cy="3200400"/>
+            <a:off x="365760" y="1371600"/>
+            <a:ext cx="3291840" cy="2011680"/>
+          </a:xfrm>
+          <a:prstGeom prst="rect">
+            <a:avLst/>
+          </a:prstGeom>
+          <a:solidFill>
+            <a:srgbClr val="F7F7F7"/>
+          </a:solidFill>
+          <a:ln w="12700">
+            <a:solidFill>
+              <a:srgbClr val="BFBFBF"/>
+            </a:solidFill>
+            <a:prstDash val="dash"/>
+          </a:ln>
+        </p:spPr>
+      </p:sp>
+      <p:sp>
+        <p:nvSpPr>
+          <p:cNvPr id="7" name="Text 5"/>
+          <p:cNvSpPr/>
+          <p:nvPr/>
+        </p:nvSpPr>
+        <p:spPr>
+          <a:xfrm>
+            <a:off x="365760" y="2103120"/>
+            <a:ext cx="3291840" cy="548640"/>
+          </a:xfrm>
+          <a:prstGeom prst="rect">
+            <a:avLst/>
+          </a:prstGeom>
+          <a:noFill/>
+          <a:ln/>
+        </p:spPr>
+        <p:txBody>
+          <a:bodyPr wrap="square" lIns="0" tIns="0" rIns="0" bIns="0" rtlCol="0" anchor="ctr"/>
+          <a:lstStyle/>
+          <a:p>
+            <a:pPr algn="ctr" indent="0" marL="0">
+              <a:buNone/>
+            </a:pPr>
+            <a:r>
+              <a:rPr lang="en-US" sz="1100" dirty="0">
+                <a:solidFill>
+                  <a:srgbClr val="909090"/>
+                </a:solidFill>
+                <a:latin typeface="Arial" pitchFamily="34" charset="0"/>
+                <a:ea typeface="Arial" pitchFamily="34" charset="-122"/>
+                <a:cs typeface="Arial" pitchFamily="34" charset="-120"/>
+              </a:rPr>
+              <a:t>NTC 외관 사진 삽입</a:t>
+            </a:r>
+            <a:endParaRPr lang="en-US" sz="1100" dirty="0"/>
+          </a:p>
+        </p:txBody>
+      </p:sp>
+      <p:sp>
+        <p:nvSpPr>
+          <p:cNvPr id="8" name="Shape 6"/>
+          <p:cNvSpPr/>
+          <p:nvPr/>
+        </p:nvSpPr>
+        <p:spPr>
+          <a:xfrm>
+            <a:off x="365760" y="3520440"/>
+            <a:ext cx="3291840" cy="2011680"/>
+          </a:xfrm>
+          <a:prstGeom prst="rect">
+            <a:avLst/>
+          </a:prstGeom>
+          <a:solidFill>
+            <a:srgbClr val="F7F7F7"/>
+          </a:solidFill>
+          <a:ln w="12700">
+            <a:solidFill>
+              <a:srgbClr val="BFBFBF"/>
+            </a:solidFill>
+            <a:prstDash val="dash"/>
+          </a:ln>
+        </p:spPr>
+      </p:sp>
+      <p:sp>
+        <p:nvSpPr>
+          <p:cNvPr id="9" name="Text 7"/>
+          <p:cNvSpPr/>
+          <p:nvPr/>
+        </p:nvSpPr>
+        <p:spPr>
+          <a:xfrm>
+            <a:off x="365760" y="4251960"/>
+            <a:ext cx="3291840" cy="548640"/>
+          </a:xfrm>
+          <a:prstGeom prst="rect">
+            <a:avLst/>
+          </a:prstGeom>
+          <a:noFill/>
+          <a:ln/>
+        </p:spPr>
+        <p:txBody>
+          <a:bodyPr wrap="square" lIns="0" tIns="0" rIns="0" bIns="0" rtlCol="0" anchor="ctr"/>
+          <a:lstStyle/>
+          <a:p>
+            <a:pPr algn="ctr" indent="0" marL="0">
+              <a:buNone/>
+            </a:pPr>
+            <a:r>
+              <a:rPr lang="en-US" sz="1100" dirty="0">
+                <a:solidFill>
+                  <a:srgbClr val="909090"/>
+                </a:solidFill>
+                <a:latin typeface="Arial" pitchFamily="34" charset="0"/>
+                <a:ea typeface="Arial" pitchFamily="34" charset="-122"/>
+                <a:cs typeface="Arial" pitchFamily="34" charset="-120"/>
+              </a:rPr>
+              <a:t>단면 사진 삽입</a:t>
+            </a:r>
+            <a:endParaRPr lang="en-US" sz="1100" dirty="0"/>
+          </a:p>
+          <a:p>
+            <a:pPr algn="ctr" indent="0" marL="0">
+              <a:buNone/>
+            </a:pPr>
+            <a:r>
+              <a:rPr lang="en-US" sz="1100" dirty="0">
+                <a:solidFill>
+                  <a:srgbClr val="909090"/>
+                </a:solidFill>
+                <a:latin typeface="Arial" pitchFamily="34" charset="0"/>
+                <a:ea typeface="Arial" pitchFamily="34" charset="-122"/>
+                <a:cs typeface="Arial" pitchFamily="34" charset="-120"/>
+              </a:rPr>
+              <a:t>(422 / 527 / 119 um)</a:t>
+            </a:r>
+            <a:endParaRPr lang="en-US" sz="1100" dirty="0"/>
+          </a:p>
+        </p:txBody>
+      </p:sp>
+      <p:sp>
+        <p:nvSpPr>
+          <p:cNvPr id="10" name="Text 8"/>
+          <p:cNvSpPr/>
+          <p:nvPr/>
+        </p:nvSpPr>
+        <p:spPr>
+          <a:xfrm>
+            <a:off x="365760" y="5596128"/>
+            <a:ext cx="3291840" cy="256032"/>
+          </a:xfrm>
+          <a:prstGeom prst="rect">
+            <a:avLst/>
+          </a:prstGeom>
+          <a:noFill/>
+          <a:ln/>
+        </p:spPr>
+        <p:txBody>
+          <a:bodyPr wrap="square" lIns="0" tIns="0" rIns="0" bIns="0" rtlCol="0" anchor="ctr"/>
+          <a:lstStyle/>
+          <a:p>
+            <a:pPr algn="ctr" indent="0" marL="0">
+              <a:buNone/>
+            </a:pPr>
+            <a:r>
+              <a:rPr lang="en-US" sz="900" b="1" dirty="0">
+                <a:solidFill>
+                  <a:srgbClr val="C00000"/>
+                </a:solidFill>
+                <a:latin typeface="Arial" pitchFamily="34" charset="0"/>
+                <a:ea typeface="Arial" pitchFamily="34" charset="-122"/>
+                <a:cs typeface="Arial" pitchFamily="34" charset="-120"/>
+              </a:rPr>
+              <a:t>&lt; 설비 자동 도포 시 편차 불량 예시 &gt;</a:t>
+            </a:r>
+            <a:endParaRPr lang="en-US" sz="900" dirty="0"/>
+          </a:p>
+        </p:txBody>
+      </p:sp>
+      <p:sp>
+        <p:nvSpPr>
+          <p:cNvPr id="11" name="Shape 9"/>
+          <p:cNvSpPr/>
+          <p:nvPr/>
+        </p:nvSpPr>
+        <p:spPr>
+          <a:xfrm>
+            <a:off x="3886200" y="1371600"/>
+            <a:ext cx="4892040" cy="4160520"/>
+          </a:xfrm>
+          <a:prstGeom prst="rect">
+            <a:avLst/>
+          </a:prstGeom>
+          <a:solidFill>
+            <a:srgbClr val="FFFFFF"/>
+          </a:solidFill>
+          <a:ln w="12700">
+            <a:solidFill>
+              <a:srgbClr val="808080"/>
+            </a:solidFill>
+            <a:prstDash val="solid"/>
+          </a:ln>
+        </p:spPr>
+      </p:sp>
+      <p:sp>
+        <p:nvSpPr>
+          <p:cNvPr id="12" name="Text 10"/>
+          <p:cNvSpPr/>
+          <p:nvPr/>
+        </p:nvSpPr>
+        <p:spPr>
+          <a:xfrm>
+            <a:off x="4069080" y="1508760"/>
+            <a:ext cx="4572000" cy="3886200"/>
           </a:xfrm>
           <a:prstGeom prst="rect">
             <a:avLst/>
@@ -5690,12 +8147,8 @@
           <a:bodyPr wrap="square" lIns="0" tIns="0" rIns="0" bIns="0" rtlCol="0" anchor="t"/>
           <a:lstStyle/>
           <a:p>
-            <a:pPr algn="l" marL="342900" indent="-342900">
-              <a:spcAft>
-                <a:spcPts val="1800"/>
-              </a:spcAft>
-              <a:buSzPct val="100000"/>
-              <a:buChar char="•"/>
+            <a:pPr algn="l" indent="0" marL="0">
+              <a:buNone/>
             </a:pPr>
             <a:r>
               <a:rPr lang="en-US" sz="1200" b="1" dirty="0">
@@ -5706,17 +8159,110 @@
                 <a:ea typeface="Arial" pitchFamily="34" charset="-122"/>
                 <a:cs typeface="Arial" pitchFamily="34" charset="-120"/>
               </a:rPr>
-              <a:t>부위별 코팅 두께 측정 결과: 센싱탭 [ ]um / 퓨즈 [ ]um / 커넥터 [ ]um / NTC [ ]um 수준</a:t>
+              <a:t>□ 설비 자동 도포 시 문제점</a:t>
             </a:r>
             <a:endParaRPr lang="en-US" sz="1200" dirty="0"/>
           </a:p>
           <a:p>
-            <a:pPr algn="l" marL="342900" indent="-342900">
-              <a:spcAft>
-                <a:spcPts val="1800"/>
-              </a:spcAft>
-              <a:buSzPct val="100000"/>
-              <a:buChar char="•"/>
+            <a:pPr algn="l" indent="0" marL="0">
+              <a:buNone/>
+            </a:pPr>
+            <a:endParaRPr lang="en-US" sz="1200" dirty="0"/>
+          </a:p>
+          <a:p>
+            <a:pPr algn="l" indent="0" marL="0">
+              <a:buNone/>
+            </a:pPr>
+            <a:r>
+              <a:rPr lang="en-US" sz="1100" dirty="0">
+                <a:solidFill>
+                  <a:srgbClr val="000000"/>
+                </a:solidFill>
+                <a:latin typeface="Arial" pitchFamily="34" charset="0"/>
+                <a:ea typeface="Arial" pitchFamily="34" charset="-122"/>
+                <a:cs typeface="Arial" pitchFamily="34" charset="-120"/>
+              </a:rPr>
+              <a:t>  - NTC 소자 기준 좌/우 코팅 두께 편차 발생</a:t>
+            </a:r>
+            <a:endParaRPr lang="en-US" sz="1200" dirty="0"/>
+          </a:p>
+          <a:p>
+            <a:pPr algn="l" indent="0" marL="0">
+              <a:buNone/>
+            </a:pPr>
+            <a:r>
+              <a:rPr lang="en-US" sz="1100" dirty="0">
+                <a:solidFill>
+                  <a:srgbClr val="000000"/>
+                </a:solidFill>
+                <a:latin typeface="Arial" pitchFamily="34" charset="0"/>
+                <a:ea typeface="Arial" pitchFamily="34" charset="-122"/>
+                <a:cs typeface="Arial" pitchFamily="34" charset="-120"/>
+              </a:rPr>
+              <a:t>    (예: 좌 422um / 상 527um / 우 119um)</a:t>
+            </a:r>
+            <a:endParaRPr lang="en-US" sz="1200" dirty="0"/>
+          </a:p>
+          <a:p>
+            <a:pPr algn="l" indent="0" marL="0">
+              <a:buNone/>
+            </a:pPr>
+            <a:r>
+              <a:rPr lang="en-US" sz="1100" dirty="0">
+                <a:solidFill>
+                  <a:srgbClr val="000000"/>
+                </a:solidFill>
+                <a:latin typeface="Arial" pitchFamily="34" charset="0"/>
+                <a:ea typeface="Arial" pitchFamily="34" charset="-122"/>
+                <a:cs typeface="Arial" pitchFamily="34" charset="-120"/>
+              </a:rPr>
+              <a:t>  - 노즐 토출 경로 특성상 소자 한쪽으로 코팅액 쏠림 발생</a:t>
+            </a:r>
+            <a:endParaRPr lang="en-US" sz="1200" dirty="0"/>
+          </a:p>
+          <a:p>
+            <a:pPr algn="l" indent="0" marL="0">
+              <a:buNone/>
+            </a:pPr>
+            <a:r>
+              <a:rPr lang="en-US" sz="1100" dirty="0">
+                <a:solidFill>
+                  <a:srgbClr val="000000"/>
+                </a:solidFill>
+                <a:latin typeface="Arial" pitchFamily="34" charset="0"/>
+                <a:ea typeface="Arial" pitchFamily="34" charset="-122"/>
+                <a:cs typeface="Arial" pitchFamily="34" charset="-120"/>
+              </a:rPr>
+              <a:t>    → 한쪽 과도포 / 반대쪽 박도포</a:t>
+            </a:r>
+            <a:endParaRPr lang="en-US" sz="1200" dirty="0"/>
+          </a:p>
+          <a:p>
+            <a:pPr algn="l" indent="0" marL="0">
+              <a:buNone/>
+            </a:pPr>
+            <a:r>
+              <a:rPr lang="en-US" sz="1100" dirty="0">
+                <a:solidFill>
+                  <a:srgbClr val="000000"/>
+                </a:solidFill>
+                <a:latin typeface="Arial" pitchFamily="34" charset="0"/>
+                <a:ea typeface="Arial" pitchFamily="34" charset="-122"/>
+                <a:cs typeface="Arial" pitchFamily="34" charset="-120"/>
+              </a:rPr>
+              <a:t>  - 박도포부는 소자 보호·절연 성능 저하 우려</a:t>
+            </a:r>
+            <a:endParaRPr lang="en-US" sz="1200" dirty="0"/>
+          </a:p>
+          <a:p>
+            <a:pPr algn="l" indent="0" marL="0">
+              <a:buNone/>
+            </a:pPr>
+            <a:endParaRPr lang="en-US" sz="1200" dirty="0"/>
+          </a:p>
+          <a:p>
+            <a:pPr algn="l" indent="0" marL="0">
+              <a:buNone/>
             </a:pPr>
             <a:r>
               <a:rPr lang="en-US" sz="1200" b="1" dirty="0">
@@ -5727,17 +8273,76 @@
                 <a:ea typeface="Arial" pitchFamily="34" charset="-122"/>
                 <a:cs typeface="Arial" pitchFamily="34" charset="-120"/>
               </a:rPr>
-              <a:t>코팅 두께 관리 기준: [ 부위별 관리 기준 기입 ]</a:t>
+              <a:t>□ 개선 방안 : NTC부 Manual 도포 적용</a:t>
             </a:r>
             <a:endParaRPr lang="en-US" sz="1200" dirty="0"/>
           </a:p>
           <a:p>
-            <a:pPr algn="l" marL="342900" indent="-342900">
-              <a:spcAft>
-                <a:spcPts val="1800"/>
-              </a:spcAft>
-              <a:buSzPct val="100000"/>
-              <a:buChar char="•"/>
+            <a:pPr algn="l" indent="0" marL="0">
+              <a:buNone/>
+            </a:pPr>
+            <a:endParaRPr lang="en-US" sz="1200" dirty="0"/>
+          </a:p>
+          <a:p>
+            <a:pPr algn="l" indent="0" marL="0">
+              <a:buNone/>
+            </a:pPr>
+            <a:r>
+              <a:rPr lang="en-US" sz="1100" dirty="0">
+                <a:solidFill>
+                  <a:srgbClr val="000000"/>
+                </a:solidFill>
+                <a:latin typeface="Arial" pitchFamily="34" charset="0"/>
+                <a:ea typeface="Arial" pitchFamily="34" charset="-122"/>
+                <a:cs typeface="Arial" pitchFamily="34" charset="-120"/>
+              </a:rPr>
+              <a:t>  - 소자 중심 기준 도포 위치/양 조절 가능</a:t>
+            </a:r>
+            <a:endParaRPr lang="en-US" sz="1200" dirty="0"/>
+          </a:p>
+          <a:p>
+            <a:pPr algn="l" indent="0" marL="0">
+              <a:buNone/>
+            </a:pPr>
+            <a:r>
+              <a:rPr lang="en-US" sz="1100" dirty="0">
+                <a:solidFill>
+                  <a:srgbClr val="000000"/>
+                </a:solidFill>
+                <a:latin typeface="Arial" pitchFamily="34" charset="0"/>
+                <a:ea typeface="Arial" pitchFamily="34" charset="-122"/>
+                <a:cs typeface="Arial" pitchFamily="34" charset="-120"/>
+              </a:rPr>
+              <a:t>    → 좌/우 균일한 돔 형상 확보</a:t>
+            </a:r>
+            <a:endParaRPr lang="en-US" sz="1200" dirty="0"/>
+          </a:p>
+          <a:p>
+            <a:pPr algn="l" indent="0" marL="0">
+              <a:buNone/>
+            </a:pPr>
+            <a:r>
+              <a:rPr lang="en-US" sz="1100" dirty="0">
+                <a:solidFill>
+                  <a:srgbClr val="000000"/>
+                </a:solidFill>
+                <a:latin typeface="Arial" pitchFamily="34" charset="0"/>
+                <a:ea typeface="Arial" pitchFamily="34" charset="-122"/>
+                <a:cs typeface="Arial" pitchFamily="34" charset="-120"/>
+              </a:rPr>
+              <a:t>  - 두께 편차 최소화로 소자 보호 품질 안정성 확보</a:t>
+            </a:r>
+            <a:endParaRPr lang="en-US" sz="1200" dirty="0"/>
+          </a:p>
+          <a:p>
+            <a:pPr algn="l" indent="0" marL="0">
+              <a:buNone/>
+            </a:pPr>
+            <a:endParaRPr lang="en-US" sz="1200" dirty="0"/>
+          </a:p>
+          <a:p>
+            <a:pPr algn="l" indent="0" marL="0">
+              <a:buNone/>
             </a:pPr>
             <a:r>
               <a:rPr lang="en-US" sz="1200" b="1" dirty="0">
@@ -5748,28 +8353,21 @@
                 <a:ea typeface="Arial" pitchFamily="34" charset="-122"/>
                 <a:cs typeface="Arial" pitchFamily="34" charset="-120"/>
               </a:rPr>
-              <a:t>NTC부는 설비 자동 도포 시 좌/우 편차 발생 → Manual 도포 적용 제안</a:t>
-            </a:r>
-            <a:endParaRPr lang="en-US" sz="1200" dirty="0"/>
-          </a:p>
-          <a:p>
-            <a:pPr algn="l" marL="342900" indent="-342900">
-              <a:spcAft>
-                <a:spcPts val="1800"/>
-              </a:spcAft>
-              <a:buSzPct val="100000"/>
-              <a:buChar char="•"/>
+              <a:t>□ 결론 : </a:t>
+            </a:r>
+            <a:pPr algn="l" indent="0" marL="0">
+              <a:buNone/>
             </a:pPr>
             <a:r>
               <a:rPr lang="en-US" sz="1200" b="1" dirty="0">
                 <a:solidFill>
-                  <a:srgbClr val="000000"/>
+                  <a:srgbClr val="0070C0"/>
                 </a:solidFill>
                 <a:latin typeface="Arial" pitchFamily="34" charset="0"/>
                 <a:ea typeface="Arial" pitchFamily="34" charset="-122"/>
                 <a:cs typeface="Arial" pitchFamily="34" charset="-120"/>
               </a:rPr>
-              <a:t>[ 추가 Summary 항목 ]</a:t>
+              <a:t>NTC부는 Manual 도포 적용 제안</a:t>
             </a:r>
             <a:endParaRPr lang="en-US" sz="1200" dirty="0"/>
           </a:p>
@@ -5777,46 +8375,7 @@
       </p:sp>
       <p:sp>
         <p:nvSpPr>
-          <p:cNvPr id="7" name="Text 5"/>
-          <p:cNvSpPr/>
-          <p:nvPr/>
-        </p:nvSpPr>
-        <p:spPr>
-          <a:xfrm>
-            <a:off x="548640" y="4754880"/>
-            <a:ext cx="5486400" cy="274320"/>
-          </a:xfrm>
-          <a:prstGeom prst="rect">
-            <a:avLst/>
-          </a:prstGeom>
-          <a:noFill/>
-          <a:ln/>
-        </p:spPr>
-        <p:txBody>
-          <a:bodyPr wrap="square" lIns="0" tIns="0" rIns="0" bIns="0" rtlCol="0" anchor="ctr"/>
-          <a:lstStyle/>
-          <a:p>
-            <a:pPr algn="l" indent="0" marL="0">
-              <a:buNone/>
-            </a:pPr>
-            <a:r>
-              <a:rPr lang="en-US" sz="900" i="1" dirty="0">
-                <a:solidFill>
-                  <a:srgbClr val="808080"/>
-                </a:solidFill>
-                <a:latin typeface="Arial" pitchFamily="34" charset="0"/>
-                <a:ea typeface="Arial" pitchFamily="34" charset="-122"/>
-                <a:cs typeface="Arial" pitchFamily="34" charset="-120"/>
-              </a:rPr>
-              <a:t>※ 실제 SX3K 섹션 자료 수신 후 구성/수치 업데이트 예정</a:t>
-            </a:r>
-            <a:endParaRPr lang="en-US" sz="900" dirty="0"/>
-          </a:p>
-        </p:txBody>
-      </p:sp>
-      <p:sp>
-        <p:nvSpPr>
-          <p:cNvPr id="8" name="Shape 6"/>
+          <p:cNvPr id="13" name="Shape 11"/>
           <p:cNvSpPr/>
           <p:nvPr/>
         </p:nvSpPr>
@@ -5839,7 +8398,7 @@
       </p:sp>
       <p:sp>
         <p:nvSpPr>
-          <p:cNvPr id="9" name="Text 7"/>
+          <p:cNvPr id="14" name="Text 12"/>
           <p:cNvSpPr/>
           <p:nvPr/>
         </p:nvSpPr>
@@ -5878,7 +8437,7 @@
       </p:sp>
       <p:sp>
         <p:nvSpPr>
-          <p:cNvPr id="10" name="Text 8"/>
+          <p:cNvPr id="15" name="Text 13"/>
           <p:cNvSpPr/>
           <p:nvPr/>
         </p:nvSpPr>
@@ -5910,6 +8469,535 @@
                 <a:cs typeface="Arial" pitchFamily="34" charset="-120"/>
               </a:rPr>
               <a:t>4</a:t>
+            </a:r>
+            <a:endParaRPr lang="en-US" sz="900" dirty="0"/>
+          </a:p>
+        </p:txBody>
+      </p:sp>
+      <p:sp>
+        <p:nvSpPr>
+          <p:cNvPr id="16" name="Shape 14"/>
+          <p:cNvSpPr/>
+          <p:nvPr/>
+        </p:nvSpPr>
+        <p:spPr>
+          <a:xfrm>
+            <a:off x="7818120" y="6492240"/>
+            <a:ext cx="1051560" cy="237744"/>
+          </a:xfrm>
+          <a:prstGeom prst="rect">
+            <a:avLst/>
+          </a:prstGeom>
+          <a:solidFill>
+            <a:srgbClr val="FFFFFF"/>
+          </a:solidFill>
+          <a:ln w="12700">
+            <a:solidFill>
+              <a:srgbClr val="C00000"/>
+            </a:solidFill>
+            <a:prstDash val="solid"/>
+          </a:ln>
+        </p:spPr>
+      </p:sp>
+      <p:sp>
+        <p:nvSpPr>
+          <p:cNvPr id="17" name="Text 15"/>
+          <p:cNvSpPr/>
+          <p:nvPr/>
+        </p:nvSpPr>
+        <p:spPr>
+          <a:xfrm>
+            <a:off x="7818120" y="6492240"/>
+            <a:ext cx="1051560" cy="237744"/>
+          </a:xfrm>
+          <a:prstGeom prst="rect">
+            <a:avLst/>
+          </a:prstGeom>
+          <a:noFill/>
+          <a:ln/>
+        </p:spPr>
+        <p:txBody>
+          <a:bodyPr wrap="square" lIns="0" tIns="0" rIns="0" bIns="0" rtlCol="0" anchor="ctr"/>
+          <a:lstStyle/>
+          <a:p>
+            <a:pPr algn="ctr" indent="0" marL="0">
+              <a:buNone/>
+            </a:pPr>
+            <a:r>
+              <a:rPr lang="en-US" sz="800" b="1" dirty="0">
+                <a:solidFill>
+                  <a:srgbClr val="C00000"/>
+                </a:solidFill>
+                <a:latin typeface="Arial" pitchFamily="34" charset="0"/>
+                <a:ea typeface="Arial" pitchFamily="34" charset="-122"/>
+                <a:cs typeface="Arial" pitchFamily="34" charset="-120"/>
+              </a:rPr>
+              <a:t>Confidential</a:t>
+            </a:r>
+            <a:endParaRPr lang="en-US" sz="800" dirty="0"/>
+          </a:p>
+        </p:txBody>
+      </p:sp>
+    </p:spTree>
+  </p:cSld>
+  <p:clrMapOvr>
+    <a:masterClrMapping/>
+  </p:clrMapOvr>
+</p:sld>
+</file>
+
+<file path=ppt/slides/slide5.xml><?xml version="1.0" encoding="utf-8"?>
+<p:sld xmlns:a="http://schemas.openxmlformats.org/drawingml/2006/main" xmlns:r="http://schemas.openxmlformats.org/officeDocument/2006/relationships" xmlns:p="http://schemas.openxmlformats.org/presentationml/2006/main">
+  <p:cSld name="Slide 5">
+    <p:spTree>
+      <p:nvGrpSpPr>
+        <p:cNvPr id="1" name=""/>
+        <p:cNvGrpSpPr/>
+        <p:nvPr/>
+      </p:nvGrpSpPr>
+      <p:grpSpPr>
+        <a:xfrm>
+          <a:off x="0" y="0"/>
+          <a:ext cx="0" cy="0"/>
+          <a:chOff x="0" y="0"/>
+          <a:chExt cx="0" cy="0"/>
+        </a:xfrm>
+      </p:grpSpPr>
+      <p:sp>
+        <p:nvSpPr>
+          <p:cNvPr id="2" name="Text 0"/>
+          <p:cNvSpPr/>
+          <p:nvPr/>
+        </p:nvSpPr>
+        <p:spPr>
+          <a:xfrm>
+            <a:off x="320040" y="201168"/>
+            <a:ext cx="6400800" cy="457200"/>
+          </a:xfrm>
+          <a:prstGeom prst="rect">
+            <a:avLst/>
+          </a:prstGeom>
+          <a:noFill/>
+          <a:ln/>
+        </p:spPr>
+        <p:txBody>
+          <a:bodyPr wrap="square" lIns="0" tIns="0" rIns="0" bIns="0" rtlCol="0" anchor="ctr"/>
+          <a:lstStyle/>
+          <a:p>
+            <a:pPr algn="l" indent="0" marL="0">
+              <a:buNone/>
+            </a:pPr>
+            <a:r>
+              <a:rPr lang="en-US" sz="1400" b="1" dirty="0">
+                <a:solidFill>
+                  <a:srgbClr val="000000"/>
+                </a:solidFill>
+                <a:latin typeface="Arial" pitchFamily="34" charset="0"/>
+                <a:ea typeface="Arial" pitchFamily="34" charset="-122"/>
+                <a:cs typeface="Arial" pitchFamily="34" charset="-120"/>
+              </a:rPr>
+              <a:t>■ </a:t>
+            </a:r>
+            <a:pPr algn="l" indent="0" marL="0">
+              <a:buNone/>
+            </a:pPr>
+            <a:r>
+              <a:rPr lang="en-US" sz="1800" b="1" dirty="0">
+                <a:solidFill>
+                  <a:srgbClr val="000000"/>
+                </a:solidFill>
+                <a:latin typeface="Arial" pitchFamily="34" charset="0"/>
+                <a:ea typeface="Arial" pitchFamily="34" charset="-122"/>
+                <a:cs typeface="Arial" pitchFamily="34" charset="-120"/>
+              </a:rPr>
+              <a:t>SX3K 코팅 Section 자료</a:t>
+            </a:r>
+            <a:endParaRPr lang="en-US" sz="1400" dirty="0"/>
+          </a:p>
+        </p:txBody>
+      </p:sp>
+      <p:sp>
+        <p:nvSpPr>
+          <p:cNvPr id="3" name="Text 1"/>
+          <p:cNvSpPr/>
+          <p:nvPr/>
+        </p:nvSpPr>
+        <p:spPr>
+          <a:xfrm>
+            <a:off x="7406640" y="164592"/>
+            <a:ext cx="1709928" cy="481889"/>
+          </a:xfrm>
+          <a:prstGeom prst="rect">
+            <a:avLst/>
+          </a:prstGeom>
+          <a:noFill/>
+          <a:ln/>
+        </p:spPr>
+        <p:txBody>
+          <a:bodyPr wrap="square" lIns="0" tIns="0" rIns="0" bIns="0" rtlCol="0" anchor="ctr"/>
+          <a:lstStyle/>
+          <a:p>
+            <a:pPr indent="0" marL="0">
+              <a:lnSpc>
+                <a:spcPct val="90000"/>
+              </a:lnSpc>
+              <a:buNone/>
+            </a:pPr>
+            <a:r>
+              <a:rPr lang="en-US" sz="595" i="1" dirty="0">
+                <a:solidFill>
+                  <a:srgbClr val="1F4E79"/>
+                </a:solidFill>
+                <a:latin typeface="Arial" pitchFamily="34" charset="0"/>
+                <a:ea typeface="Arial" pitchFamily="34" charset="-122"/>
+                <a:cs typeface="Arial" pitchFamily="34" charset="-120"/>
+              </a:rPr>
+              <a:t>songhyun</a:t>
+            </a:r>
+            <a:endParaRPr lang="en-US" sz="595" dirty="0"/>
+          </a:p>
+          <a:p>
+            <a:pPr indent="0" marL="0">
+              <a:lnSpc>
+                <a:spcPct val="90000"/>
+              </a:lnSpc>
+              <a:buNone/>
+            </a:pPr>
+            <a:r>
+              <a:rPr lang="en-US" sz="1360" b="1" i="1" dirty="0">
+                <a:solidFill>
+                  <a:srgbClr val="00A651"/>
+                </a:solidFill>
+                <a:latin typeface="Arial" pitchFamily="34" charset="0"/>
+                <a:ea typeface="Arial" pitchFamily="34" charset="-122"/>
+                <a:cs typeface="Arial" pitchFamily="34" charset="-120"/>
+              </a:rPr>
+              <a:t>GlowOne</a:t>
+            </a:r>
+            <a:pPr indent="0" marL="0">
+              <a:lnSpc>
+                <a:spcPct val="90000"/>
+              </a:lnSpc>
+              <a:buNone/>
+            </a:pPr>
+            <a:r>
+              <a:rPr lang="en-US" sz="1105" b="1" dirty="0">
+                <a:solidFill>
+                  <a:srgbClr val="E8420B"/>
+                </a:solidFill>
+                <a:latin typeface="Arial" pitchFamily="34" charset="0"/>
+                <a:ea typeface="Arial" pitchFamily="34" charset="-122"/>
+                <a:cs typeface="Arial" pitchFamily="34" charset="-120"/>
+              </a:rPr>
+              <a:t> ”</a:t>
+            </a:r>
+            <a:endParaRPr lang="en-US" sz="595" dirty="0"/>
+          </a:p>
+        </p:txBody>
+      </p:sp>
+      <p:sp>
+        <p:nvSpPr>
+          <p:cNvPr id="4" name="Shape 2"/>
+          <p:cNvSpPr/>
+          <p:nvPr/>
+        </p:nvSpPr>
+        <p:spPr>
+          <a:xfrm>
+            <a:off x="228600" y="713232"/>
+            <a:ext cx="8686800" cy="0"/>
+          </a:xfrm>
+          <a:prstGeom prst="line">
+            <a:avLst/>
+          </a:prstGeom>
+          <a:noFill/>
+          <a:ln w="12700">
+            <a:solidFill>
+              <a:srgbClr val="808080"/>
+            </a:solidFill>
+            <a:prstDash val="solid"/>
+          </a:ln>
+        </p:spPr>
+      </p:sp>
+      <p:sp>
+        <p:nvSpPr>
+          <p:cNvPr id="5" name="Text 3"/>
+          <p:cNvSpPr/>
+          <p:nvPr/>
+        </p:nvSpPr>
+        <p:spPr>
+          <a:xfrm>
+            <a:off x="365760" y="914400"/>
+            <a:ext cx="8229600" cy="320040"/>
+          </a:xfrm>
+          <a:prstGeom prst="rect">
+            <a:avLst/>
+          </a:prstGeom>
+          <a:noFill/>
+          <a:ln/>
+        </p:spPr>
+        <p:txBody>
+          <a:bodyPr wrap="square" lIns="0" tIns="0" rIns="0" bIns="0" rtlCol="0" anchor="ctr"/>
+          <a:lstStyle/>
+          <a:p>
+            <a:pPr algn="l" indent="0" marL="0">
+              <a:buNone/>
+            </a:pPr>
+            <a:r>
+              <a:rPr lang="en-US" sz="1300" b="1" dirty="0">
+                <a:solidFill>
+                  <a:srgbClr val="000000"/>
+                </a:solidFill>
+                <a:latin typeface="Arial" pitchFamily="34" charset="0"/>
+                <a:ea typeface="Arial" pitchFamily="34" charset="-122"/>
+                <a:cs typeface="Arial" pitchFamily="34" charset="-120"/>
+              </a:rPr>
+              <a:t>6.  Summary</a:t>
+            </a:r>
+            <a:endParaRPr lang="en-US" sz="1300" dirty="0"/>
+          </a:p>
+        </p:txBody>
+      </p:sp>
+      <p:sp>
+        <p:nvSpPr>
+          <p:cNvPr id="6" name="Text 4"/>
+          <p:cNvSpPr/>
+          <p:nvPr/>
+        </p:nvSpPr>
+        <p:spPr>
+          <a:xfrm>
+            <a:off x="548640" y="1371600"/>
+            <a:ext cx="8138160" cy="3200400"/>
+          </a:xfrm>
+          <a:prstGeom prst="rect">
+            <a:avLst/>
+          </a:prstGeom>
+          <a:noFill/>
+          <a:ln/>
+        </p:spPr>
+        <p:txBody>
+          <a:bodyPr wrap="square" lIns="0" tIns="0" rIns="0" bIns="0" rtlCol="0" anchor="t"/>
+          <a:lstStyle/>
+          <a:p>
+            <a:pPr algn="l" marL="342900" indent="-342900">
+              <a:spcAft>
+                <a:spcPts val="1800"/>
+              </a:spcAft>
+              <a:buSzPct val="100000"/>
+              <a:buChar char="•"/>
+            </a:pPr>
+            <a:r>
+              <a:rPr lang="en-US" sz="1200" b="1" dirty="0">
+                <a:solidFill>
+                  <a:srgbClr val="000000"/>
+                </a:solidFill>
+                <a:latin typeface="Arial" pitchFamily="34" charset="0"/>
+                <a:ea typeface="Arial" pitchFamily="34" charset="-122"/>
+                <a:cs typeface="Arial" pitchFamily="34" charset="-120"/>
+              </a:rPr>
+              <a:t>부위별 코팅 두께 측정 결과: 센싱탭 [ ]um / 퓨즈 [ ]um / 커넥터 [ ]um / NTC [ ]um 수준</a:t>
+            </a:r>
+            <a:endParaRPr lang="en-US" sz="1200" dirty="0"/>
+          </a:p>
+          <a:p>
+            <a:pPr algn="l" marL="342900" indent="-342900">
+              <a:spcAft>
+                <a:spcPts val="1800"/>
+              </a:spcAft>
+              <a:buSzPct val="100000"/>
+              <a:buChar char="•"/>
+            </a:pPr>
+            <a:r>
+              <a:rPr lang="en-US" sz="1200" b="1" dirty="0">
+                <a:solidFill>
+                  <a:srgbClr val="000000"/>
+                </a:solidFill>
+                <a:latin typeface="Arial" pitchFamily="34" charset="0"/>
+                <a:ea typeface="Arial" pitchFamily="34" charset="-122"/>
+                <a:cs typeface="Arial" pitchFamily="34" charset="-120"/>
+              </a:rPr>
+              <a:t>코팅 두께 관리 기준: [ 부위별 관리 기준 기입 ]</a:t>
+            </a:r>
+            <a:endParaRPr lang="en-US" sz="1200" dirty="0"/>
+          </a:p>
+          <a:p>
+            <a:pPr algn="l" marL="342900" indent="-342900">
+              <a:spcAft>
+                <a:spcPts val="1800"/>
+              </a:spcAft>
+              <a:buSzPct val="100000"/>
+              <a:buChar char="•"/>
+            </a:pPr>
+            <a:r>
+              <a:rPr lang="en-US" sz="1200" b="1" dirty="0">
+                <a:solidFill>
+                  <a:srgbClr val="000000"/>
+                </a:solidFill>
+                <a:latin typeface="Arial" pitchFamily="34" charset="0"/>
+                <a:ea typeface="Arial" pitchFamily="34" charset="-122"/>
+                <a:cs typeface="Arial" pitchFamily="34" charset="-120"/>
+              </a:rPr>
+              <a:t>NTC부는 설비 자동 도포 시 좌/우 편차 발생 → Manual 도포 적용 제안</a:t>
+            </a:r>
+            <a:endParaRPr lang="en-US" sz="1200" dirty="0"/>
+          </a:p>
+          <a:p>
+            <a:pPr algn="l" marL="342900" indent="-342900">
+              <a:spcAft>
+                <a:spcPts val="1800"/>
+              </a:spcAft>
+              <a:buSzPct val="100000"/>
+              <a:buChar char="•"/>
+            </a:pPr>
+            <a:r>
+              <a:rPr lang="en-US" sz="1200" b="1" dirty="0">
+                <a:solidFill>
+                  <a:srgbClr val="000000"/>
+                </a:solidFill>
+                <a:latin typeface="Arial" pitchFamily="34" charset="0"/>
+                <a:ea typeface="Arial" pitchFamily="34" charset="-122"/>
+                <a:cs typeface="Arial" pitchFamily="34" charset="-120"/>
+              </a:rPr>
+              <a:t>[ 추가 Summary 항목 ]</a:t>
+            </a:r>
+            <a:endParaRPr lang="en-US" sz="1200" dirty="0"/>
+          </a:p>
+        </p:txBody>
+      </p:sp>
+      <p:sp>
+        <p:nvSpPr>
+          <p:cNvPr id="7" name="Text 5"/>
+          <p:cNvSpPr/>
+          <p:nvPr/>
+        </p:nvSpPr>
+        <p:spPr>
+          <a:xfrm>
+            <a:off x="548640" y="4754880"/>
+            <a:ext cx="5486400" cy="274320"/>
+          </a:xfrm>
+          <a:prstGeom prst="rect">
+            <a:avLst/>
+          </a:prstGeom>
+          <a:noFill/>
+          <a:ln/>
+        </p:spPr>
+        <p:txBody>
+          <a:bodyPr wrap="square" lIns="0" tIns="0" rIns="0" bIns="0" rtlCol="0" anchor="ctr"/>
+          <a:lstStyle/>
+          <a:p>
+            <a:pPr algn="l" indent="0" marL="0">
+              <a:buNone/>
+            </a:pPr>
+            <a:r>
+              <a:rPr lang="en-US" sz="900" i="1" dirty="0">
+                <a:solidFill>
+                  <a:srgbClr val="808080"/>
+                </a:solidFill>
+                <a:latin typeface="Arial" pitchFamily="34" charset="0"/>
+                <a:ea typeface="Arial" pitchFamily="34" charset="-122"/>
+                <a:cs typeface="Arial" pitchFamily="34" charset="-120"/>
+              </a:rPr>
+              <a:t>※ 실제 SX3K 섹션 자료 수신 후 구성/수치 업데이트 예정</a:t>
+            </a:r>
+            <a:endParaRPr lang="en-US" sz="900" dirty="0"/>
+          </a:p>
+        </p:txBody>
+      </p:sp>
+      <p:sp>
+        <p:nvSpPr>
+          <p:cNvPr id="8" name="Shape 6"/>
+          <p:cNvSpPr/>
+          <p:nvPr/>
+        </p:nvSpPr>
+        <p:spPr>
+          <a:xfrm>
+            <a:off x="228600" y="6473952"/>
+            <a:ext cx="8686800" cy="0"/>
+          </a:xfrm>
+          <a:prstGeom prst="line">
+            <a:avLst/>
+          </a:prstGeom>
+          <a:noFill/>
+          <a:ln w="19050">
+            <a:solidFill>
+              <a:srgbClr val="00A651"/>
+            </a:solidFill>
+            <a:prstDash val="solid"/>
+          </a:ln>
+        </p:spPr>
+      </p:sp>
+      <p:sp>
+        <p:nvSpPr>
+          <p:cNvPr id="9" name="Text 7"/>
+          <p:cNvSpPr/>
+          <p:nvPr/>
+        </p:nvSpPr>
+        <p:spPr>
+          <a:xfrm>
+            <a:off x="228600" y="6510528"/>
+            <a:ext cx="4206240" cy="228600"/>
+          </a:xfrm>
+          <a:prstGeom prst="rect">
+            <a:avLst/>
+          </a:prstGeom>
+          <a:noFill/>
+          <a:ln/>
+        </p:spPr>
+        <p:txBody>
+          <a:bodyPr wrap="square" lIns="0" tIns="0" rIns="0" bIns="0" rtlCol="0" anchor="ctr"/>
+          <a:lstStyle/>
+          <a:p>
+            <a:pPr algn="l" indent="0" marL="0">
+              <a:buNone/>
+            </a:pPr>
+            <a:r>
+              <a:rPr lang="en-US" sz="750" i="1" dirty="0">
+                <a:solidFill>
+                  <a:srgbClr val="00A651"/>
+                </a:solidFill>
+                <a:latin typeface="Arial" pitchFamily="34" charset="0"/>
+                <a:ea typeface="Arial" pitchFamily="34" charset="-122"/>
+                <a:cs typeface="Arial" pitchFamily="34" charset="-120"/>
+              </a:rPr>
+              <a:t>Creative Solution Company with Advanced Technology</a:t>
+            </a:r>
+            <a:endParaRPr lang="en-US" sz="750" dirty="0"/>
+          </a:p>
+        </p:txBody>
+      </p:sp>
+      <p:sp>
+        <p:nvSpPr>
+          <p:cNvPr id="10" name="Text 8"/>
+          <p:cNvSpPr/>
+          <p:nvPr/>
+        </p:nvSpPr>
+        <p:spPr>
+          <a:xfrm>
+            <a:off x="4206240" y="6510528"/>
+            <a:ext cx="731520" cy="228600"/>
+          </a:xfrm>
+          <a:prstGeom prst="rect">
+            <a:avLst/>
+          </a:prstGeom>
+          <a:noFill/>
+          <a:ln/>
+        </p:spPr>
+        <p:txBody>
+          <a:bodyPr wrap="square" lIns="0" tIns="0" rIns="0" bIns="0" rtlCol="0" anchor="ctr"/>
+          <a:lstStyle/>
+          <a:p>
+            <a:pPr algn="ctr" indent="0" marL="0">
+              <a:buNone/>
+            </a:pPr>
+            <a:r>
+              <a:rPr lang="en-US" sz="900" dirty="0">
+                <a:solidFill>
+                  <a:srgbClr val="404040"/>
+                </a:solidFill>
+                <a:latin typeface="Arial" pitchFamily="34" charset="0"/>
+                <a:ea typeface="Arial" pitchFamily="34" charset="-122"/>
+                <a:cs typeface="Arial" pitchFamily="34" charset="-120"/>
+              </a:rPr>
+              <a:t>5</a:t>
             </a:r>
             <a:endParaRPr lang="en-US" sz="900" dirty="0"/>
           </a:p>
